--- a/lecons/F3/25_FORM4_LESSON21_Lower_Course.pptx
+++ b/lecons/F3/25_FORM4_LESSON21_Lower_Course.pptx
@@ -49,9 +49,14 @@
     <p:sldId id="297" r:id="rId43"/>
     <p:sldId id="298" r:id="rId44"/>
     <p:sldId id="299" r:id="rId45"/>
+    <p:sldId id="300" r:id="rId46"/>
+    <p:sldId id="301" r:id="rId47"/>
+    <p:sldId id="302" r:id="rId48"/>
+    <p:sldId id="303" r:id="rId49"/>
+    <p:sldId id="304" r:id="rId50"/>
   </p:sldIdLst>
   <p:notesMasterIdLst>
-    <p:notesMasterId r:id="rId46"/>
+    <p:notesMasterId r:id="rId51"/>
   </p:notesMasterIdLst>
   <p:sldSz cx="12192000" cy="6858000"/>
   <p:notesSz cx="6858000" cy="12192000"/>
@@ -633,7 +638,7 @@
           <a:p>
             <a:r>
               <a:rPr lang="en-US" dirty="0"/>
-              <a:t>Listen carefully to this situation from real life. In the dry season, Oumar sees many sandbanks in the Benue at Garoua. The water splits into small channels. He wonders where all this sand comes from. Think about it, because I am going to ask you some questions.</a:t>
+              <a:t>Listen carefully to this situation from real life. In the dry season, Oumar sees many sandbanks in the Benue at Garoua, and the water splits into small channels. In the rainy season, the river covers the flat land around it. He asks: "Where does all this sand come from, and what does the river build near its mouth?" Think about it, because I am going to ask you some questions.</a:t>
             </a:r>
             <a:endParaRPr lang="en-US" dirty="0"/>
           </a:p>
@@ -809,7 +814,7 @@
           <a:p>
             <a:r>
               <a:rPr lang="en-US" dirty="0"/>
-              <a:t>Good. Oumar does not know where the sandbanks come from.</a:t>
+              <a:t>Good. Oumar does not know where the sand comes from and what landforms the river builds in its lower course.</a:t>
             </a:r>
             <a:endParaRPr lang="en-US" dirty="0"/>
           </a:p>
@@ -897,7 +902,7 @@
           <a:p>
             <a:r>
               <a:rPr lang="en-US" dirty="0"/>
-              <a:t>Question 2: What did the river do with its sand? Think for a moment, then raise your hand to answer.</a:t>
+              <a:t>Question 2: What does he see in the dry season? Think for a moment, then raise your hand to answer.</a:t>
             </a:r>
             <a:endParaRPr lang="en-US" dirty="0"/>
           </a:p>
@@ -985,7 +990,7 @@
           <a:p>
             <a:r>
               <a:rPr lang="en-US" dirty="0"/>
-              <a:t>Good. It dropped it (deposition).</a:t>
+              <a:t>Good. Sandbanks and small channels.</a:t>
             </a:r>
             <a:endParaRPr lang="en-US" dirty="0"/>
           </a:p>
@@ -1073,7 +1078,7 @@
           <a:p>
             <a:r>
               <a:rPr lang="en-US" dirty="0"/>
-              <a:t>Question 3: Why does the river drop its load? Think for a moment, then raise your hand to answer.</a:t>
+              <a:t>Question 3: What happens in the rainy season? Think for a moment, then raise your hand to answer.</a:t>
             </a:r>
             <a:endParaRPr lang="en-US" dirty="0"/>
           </a:p>
@@ -1161,7 +1166,7 @@
           <a:p>
             <a:r>
               <a:rPr lang="en-US" dirty="0"/>
-              <a:t>Good. The water is slow and there is less water.</a:t>
+              <a:t>Good. The river floods the flat land around it.</a:t>
             </a:r>
             <a:endParaRPr lang="en-US" dirty="0"/>
           </a:p>
@@ -1425,7 +1430,7 @@
           <a:p>
             <a:r>
               <a:rPr lang="en-US" dirty="0"/>
-              <a:t>Activity 1. Look carefully at this picture: flat land beside a river, covered by flood water. Observe every detail before I ask the question.</a:t>
+              <a:t>Activity 1. Look carefully at this picture: flat land beside a river. Observe every detail before I ask the question.</a:t>
             </a:r>
             <a:endParaRPr lang="en-US" dirty="0"/>
           </a:p>
@@ -1601,7 +1606,7 @@
           <a:p>
             <a:r>
               <a:rPr lang="en-US" dirty="0"/>
-              <a:t>Here is the question for Activity 1: This flat land is covered by the river in floods. What is it called? Take one minute to think and write your answer in your rough notebook.</a:t>
+              <a:t>Here is the question for Activity 1: This flat land is covered by the river during floods. What is it called? Take one minute to think and write your answer in your rough notebook.</a:t>
             </a:r>
             <a:endParaRPr lang="en-US" dirty="0"/>
           </a:p>
@@ -1777,7 +1782,7 @@
           <a:p>
             <a:r>
               <a:rPr lang="en-US" dirty="0"/>
-              <a:t>Activity 2. Look carefully at this animation: animation: an ox-bow lake forms. Watch the animation to the end; it will play again.</a:t>
+              <a:t>Activity 2. Look carefully at this animation: animation: the formation of an ox-bow lake. Watch the animation to the end; it will play again.</a:t>
             </a:r>
             <a:endParaRPr lang="en-US" dirty="0"/>
           </a:p>
@@ -1953,7 +1958,7 @@
           <a:p>
             <a:r>
               <a:rPr lang="en-US" dirty="0"/>
-              <a:t>Let us check the answer together. The river cuts through the neck of a meander and leaves the old bend.</a:t>
+              <a:t>Let us check the answer together. The river cuts through the neck of a meander and leaves the old bend as a lake.</a:t>
             </a:r>
             <a:endParaRPr lang="en-US" dirty="0"/>
           </a:p>
@@ -2041,7 +2046,7 @@
           <a:p>
             <a:r>
               <a:rPr lang="en-US" dirty="0"/>
-              <a:t>Activity 3. Look carefully at this picture: the Nile Delta seen from space. Observe every detail before I ask the question.</a:t>
+              <a:t>Activity 3. Look carefully at this picture: a delta seen from space. Observe every detail before I ask the question.</a:t>
             </a:r>
             <a:endParaRPr lang="en-US" dirty="0"/>
           </a:p>
@@ -2129,7 +2134,7 @@
           <a:p>
             <a:r>
               <a:rPr lang="en-US" dirty="0"/>
-              <a:t>Here is the question for Activity 3: The river drops its load at the sea. What landform is this? Take one minute to think and write your answer in your rough notebook.</a:t>
+              <a:t>Here is the question for Activity 3: The river drops its load where it enters the sea. What landform does it build? Take one minute to think and write your answer in your rough notebook.</a:t>
             </a:r>
             <a:endParaRPr lang="en-US" dirty="0"/>
           </a:p>
@@ -2393,7 +2398,7 @@
           <a:p>
             <a:r>
               <a:rPr lang="en-US" dirty="0"/>
-              <a:t>Let us copy Characteristics of the Lower Course. The lower course has the following characteristics. On this slide we have Slope, Water and Main process. Write each point on a new line, with the key term first, and explain it in your own words when we revise.</a:t>
+              <a:t>Let us copy the definitions. The key terms of this lesson are defined as follows. On this slide we have Lower course and Deposition. Write each point on a new line, with the key term first, and explain it in your own words when we revise. When you finish, we go to the next slide.</a:t>
             </a:r>
             <a:endParaRPr lang="en-US" dirty="0"/>
           </a:p>
@@ -2569,7 +2574,7 @@
           <a:p>
             <a:r>
               <a:rPr lang="en-US" dirty="0"/>
-              <a:t>Let us copy Landforms of the Lower Course. The lower course has the following landforms. On this slide we have Floodplain and levees and Ox-bow lake. Write each point on a new line, with the key term first, and explain it in your own words when we revise. When you finish, we go to the next slide.</a:t>
+              <a:t>We continue with the definitions. On this slide we have Alluvium. Write each point on a new line, with the key term first, and explain it in your own words when we revise.</a:t>
             </a:r>
             <a:endParaRPr lang="en-US" dirty="0"/>
           </a:p>
@@ -2657,7 +2662,7 @@
           <a:p>
             <a:r>
               <a:rPr lang="en-US" dirty="0"/>
-              <a:t>We continue with Landforms of the Lower Course. On this slide we have Delta and Braided channels. Write each point on a new line, with the key term first, and explain it in your own words when we revise.</a:t>
+              <a:t>Let us copy Main Characteristics and Processes of the Lower Course. The lower course has the following characteristics and processes. On this slide we have Almost flat land and Wide, deep channel. Write each point on a new line, with the key term first, and explain it in your own words when we revise. When you finish, we go to the next slide.</a:t>
             </a:r>
             <a:endParaRPr lang="en-US" dirty="0"/>
           </a:p>
@@ -2745,7 +2750,7 @@
           <a:p>
             <a:r>
               <a:rPr lang="en-US" dirty="0"/>
-              <a:t>Now draw this illustration in your notebook: formation of an ox-bow lake. Give it a title and label it clearly.</a:t>
+              <a:t>We continue with Main Characteristics and Processes of the Lower Course. On this slide we have Fine load and Deposition. Write each point on a new line, with the key term first, and explain it in your own words when we revise.</a:t>
             </a:r>
             <a:endParaRPr lang="en-US" dirty="0"/>
           </a:p>
@@ -2833,7 +2838,7 @@
           <a:p>
             <a:r>
               <a:rPr lang="en-US" dirty="0"/>
-              <a:t>Now let us check what you have understood. Question 1: What is the main work of the river in its lower course? Answer in your exercise book.</a:t>
+              <a:t>Let us copy Landforms of the Lower Course. The lower course has the following landforms. Copy the point on Floodplain on the left, then draw the diagram on the right: a floodplain. Give it a title and label it clearly.</a:t>
             </a:r>
             <a:endParaRPr lang="en-US" dirty="0"/>
           </a:p>
@@ -2921,7 +2926,7 @@
           <a:p>
             <a:r>
               <a:rPr lang="en-US" dirty="0"/>
-              <a:t>The expected answer is: deposition. If you got it right, well done.</a:t>
+              <a:t>Copy the point on Levees on the left, then draw the diagram on the right: levees, floodplain and delta. Give it a title and label it clearly.</a:t>
             </a:r>
             <a:endParaRPr lang="en-US" dirty="0"/>
           </a:p>
@@ -3009,7 +3014,7 @@
           <a:p>
             <a:r>
               <a:rPr lang="en-US" dirty="0"/>
-              <a:t>Now let us check what you have understood. Question 2: Give one example of a delta. Answer in your exercise book.</a:t>
+              <a:t>Copy the point on Ox-bow lake on the left, then draw the diagram on the right: formation of an ox-bow lake. Give it a title and label it clearly.</a:t>
             </a:r>
             <a:endParaRPr lang="en-US" dirty="0"/>
           </a:p>
@@ -3097,7 +3102,7 @@
           <a:p>
             <a:r>
               <a:rPr lang="en-US" dirty="0"/>
-              <a:t>The expected answer is: the Nile Delta (or the Niger Delta). If you got it right, well done.</a:t>
+              <a:t>Copy the point on Delta on the left, then draw the diagram on the right: a delta. Give it a title and label it clearly.</a:t>
             </a:r>
             <a:endParaRPr lang="en-US" dirty="0"/>
           </a:p>
@@ -3185,7 +3190,7 @@
           <a:p>
             <a:r>
               <a:rPr lang="en-US" dirty="0"/>
-              <a:t>For those who need more practice, fill in the blanks in your exercise book. The answers are: number 1, floodplain; number 2, ox-bow; number 3, delta.</a:t>
+              <a:t>We continue with Landforms of the Lower Course. On this slide we have Braided channels. Write each point on a new line, with the key term first, and explain it in your own words when we revise.</a:t>
             </a:r>
             <a:endParaRPr lang="en-US" dirty="0"/>
           </a:p>
@@ -3273,7 +3278,7 @@
           <a:p>
             <a:r>
               <a:rPr lang="en-US" dirty="0"/>
-              <a:t>For your homework: Ask two people who live or farm near the Benue: what are the advantages of the river, and what problems do the floods cause? Write their answers. We shall correct it at the beginning of our next lesson.</a:t>
+              <a:t>Now let us check what you have understood. Question 1: What is the main work of the river in its lower course? Answer in your exercise book.</a:t>
             </a:r>
             <a:endParaRPr lang="en-US" dirty="0"/>
           </a:p>
@@ -3361,7 +3366,7 @@
           <a:p>
             <a:r>
               <a:rPr lang="en-US" dirty="0"/>
-              <a:t>Our next lesson will be on Lesson 22: Man and Floodplain Interactions. Thank you for your attention, and see you next time.</a:t>
+              <a:t>The expected answer is: deposition. If you got it right, well done.</a:t>
             </a:r>
             <a:endParaRPr lang="en-US" dirty="0"/>
           </a:p>
@@ -3537,7 +3542,7 @@
           <a:p>
             <a:r>
               <a:rPr lang="en-US" dirty="0"/>
-              <a:t>Let us play the bilingual game. I say a word in English, and you give me the French word. Then we do the reverse.</a:t>
+              <a:t>Now let us check what you have understood. Question 2: Give one example of a delta. Answer in your exercise book.</a:t>
             </a:r>
             <a:endParaRPr lang="en-US" dirty="0"/>
           </a:p>
@@ -3625,7 +3630,7 @@
           <a:p>
             <a:r>
               <a:rPr lang="en-US" dirty="0"/>
-              <a:t>I record this information in the official logbook of the class after the lesson.</a:t>
+              <a:t>The expected answer is: the Nile Delta (or the Niger Delta). If you got it right, well done.</a:t>
             </a:r>
             <a:endParaRPr lang="en-US" dirty="0"/>
           </a:p>
@@ -3713,7 +3718,7 @@
           <a:p>
             <a:r>
               <a:rPr lang="en-US" dirty="0"/>
-              <a:t>I complete the second page of the logbook: the matter taught, the evaluation, the homework and the attendance.</a:t>
+              <a:t>For those who need more practice, fill in the blanks in your exercise book. The answers are: number 1, floodplain; number 2, ox-bow; number 3, delta.</a:t>
             </a:r>
             <a:endParaRPr lang="en-US" dirty="0"/>
           </a:p>
@@ -3801,7 +3806,7 @@
           <a:p>
             <a:r>
               <a:rPr lang="en-US" dirty="0"/>
-              <a:t>This slide is for me, the teacher: it gives the timing of the lesson and what to do if the projector is not available.</a:t>
+              <a:t>For your homework: Ask two people who live or farm near the Benue: what are the advantages of the river, and what problems do the floods cause? Write their answers. We shall correct it at the beginning of our next lesson.</a:t>
             </a:r>
             <a:endParaRPr lang="en-US" dirty="0"/>
           </a:p>
@@ -3889,7 +3894,7 @@
           <a:p>
             <a:r>
               <a:rPr lang="en-US" dirty="0"/>
-              <a:t>These are the references and picture credits used to prepare this lesson.</a:t>
+              <a:t>Our next lesson will be on Lesson 22: Man and Floodplain Interactions. Thank you for your attention, and see you next time.</a:t>
             </a:r>
             <a:endParaRPr lang="en-US" dirty="0"/>
           </a:p>
@@ -3913,6 +3918,446 @@
             <a:fld id="{F7021451-1387-4CA6-816F-3879F97B5CBC}" type="slidenum">
               <a:rPr lang="en-US"/>
               <a:t>44</a:t>
+            </a:fld>
+            <a:endParaRPr lang="en-US"/>
+          </a:p>
+        </p:txBody>
+      </p:sp>
+    </p:spTree>
+    <p:extLst>
+      <p:ext uri="{BB962C8B-B14F-4D97-AF65-F5344CB8AC3E}">
+        <p14:creationId xmlns:p14="http://schemas.microsoft.com/office/powerpoint/2010/main" val="1024086991"/>
+      </p:ext>
+    </p:extLst>
+  </p:cSld>
+  <p:clrMapOvr>
+    <a:masterClrMapping/>
+  </p:clrMapOvr>
+</p:notes>
+</file>
+
+<file path=ppt/notesSlides/notesSlide45.xml><?xml version="1.0" encoding="utf-8"?>
+<p:notes xmlns:a="http://schemas.openxmlformats.org/drawingml/2006/main" xmlns:r="http://schemas.openxmlformats.org/officeDocument/2006/relationships" xmlns:p="http://schemas.openxmlformats.org/presentationml/2006/main">
+  <p:cSld>
+    <p:spTree>
+      <p:nvGrpSpPr>
+        <p:cNvPr id="1" name=""/>
+        <p:cNvGrpSpPr/>
+        <p:nvPr/>
+      </p:nvGrpSpPr>
+      <p:grpSpPr>
+        <a:xfrm>
+          <a:off x="0" y="0"/>
+          <a:ext cx="0" cy="0"/>
+          <a:chOff x="0" y="0"/>
+          <a:chExt cx="0" cy="0"/>
+        </a:xfrm>
+      </p:grpSpPr>
+      <p:sp>
+        <p:nvSpPr>
+          <p:cNvPr id="2" name="Slide Image Placeholder 1"/>
+          <p:cNvSpPr>
+            <a:spLocks noGrp="1" noRot="1" noChangeAspect="1"/>
+          </p:cNvSpPr>
+          <p:nvPr>
+            <p:ph type="sldImg"/>
+          </p:nvPr>
+        </p:nvSpPr>
+        <p:spPr/>
+      </p:sp>
+      <p:sp>
+        <p:nvSpPr>
+          <p:cNvPr id="3" name="Notes Placeholder 2"/>
+          <p:cNvSpPr>
+            <a:spLocks noGrp="1"/>
+          </p:cNvSpPr>
+          <p:nvPr>
+            <p:ph type="body" idx="1"/>
+          </p:nvPr>
+        </p:nvSpPr>
+        <p:spPr/>
+        <p:txBody>
+          <a:bodyPr/>
+          <a:lstStyle/>
+          <a:p>
+            <a:r>
+              <a:rPr lang="en-US" dirty="0"/>
+              <a:t>Let us play the bilingual game. I say a word in English, and you give me the French word. Then we do the reverse.</a:t>
+            </a:r>
+            <a:endParaRPr lang="en-US" dirty="0"/>
+          </a:p>
+        </p:txBody>
+      </p:sp>
+      <p:sp>
+        <p:nvSpPr>
+          <p:cNvPr id="4" name="Slide Number Placeholder 3"/>
+          <p:cNvSpPr>
+            <a:spLocks noGrp="1"/>
+          </p:cNvSpPr>
+          <p:nvPr>
+            <p:ph type="sldNum" sz="quarter" idx="10"/>
+          </p:nvPr>
+        </p:nvSpPr>
+        <p:spPr/>
+        <p:txBody>
+          <a:bodyPr/>
+          <a:lstStyle/>
+          <a:p>
+            <a:fld id="{F7021451-1387-4CA6-816F-3879F97B5CBC}" type="slidenum">
+              <a:rPr lang="en-US"/>
+              <a:t>45</a:t>
+            </a:fld>
+            <a:endParaRPr lang="en-US"/>
+          </a:p>
+        </p:txBody>
+      </p:sp>
+    </p:spTree>
+    <p:extLst>
+      <p:ext uri="{BB962C8B-B14F-4D97-AF65-F5344CB8AC3E}">
+        <p14:creationId xmlns:p14="http://schemas.microsoft.com/office/powerpoint/2010/main" val="1024086991"/>
+      </p:ext>
+    </p:extLst>
+  </p:cSld>
+  <p:clrMapOvr>
+    <a:masterClrMapping/>
+  </p:clrMapOvr>
+</p:notes>
+</file>
+
+<file path=ppt/notesSlides/notesSlide46.xml><?xml version="1.0" encoding="utf-8"?>
+<p:notes xmlns:a="http://schemas.openxmlformats.org/drawingml/2006/main" xmlns:r="http://schemas.openxmlformats.org/officeDocument/2006/relationships" xmlns:p="http://schemas.openxmlformats.org/presentationml/2006/main">
+  <p:cSld>
+    <p:spTree>
+      <p:nvGrpSpPr>
+        <p:cNvPr id="1" name=""/>
+        <p:cNvGrpSpPr/>
+        <p:nvPr/>
+      </p:nvGrpSpPr>
+      <p:grpSpPr>
+        <a:xfrm>
+          <a:off x="0" y="0"/>
+          <a:ext cx="0" cy="0"/>
+          <a:chOff x="0" y="0"/>
+          <a:chExt cx="0" cy="0"/>
+        </a:xfrm>
+      </p:grpSpPr>
+      <p:sp>
+        <p:nvSpPr>
+          <p:cNvPr id="2" name="Slide Image Placeholder 1"/>
+          <p:cNvSpPr>
+            <a:spLocks noGrp="1" noRot="1" noChangeAspect="1"/>
+          </p:cNvSpPr>
+          <p:nvPr>
+            <p:ph type="sldImg"/>
+          </p:nvPr>
+        </p:nvSpPr>
+        <p:spPr/>
+      </p:sp>
+      <p:sp>
+        <p:nvSpPr>
+          <p:cNvPr id="3" name="Notes Placeholder 2"/>
+          <p:cNvSpPr>
+            <a:spLocks noGrp="1"/>
+          </p:cNvSpPr>
+          <p:nvPr>
+            <p:ph type="body" idx="1"/>
+          </p:nvPr>
+        </p:nvSpPr>
+        <p:spPr/>
+        <p:txBody>
+          <a:bodyPr/>
+          <a:lstStyle/>
+          <a:p>
+            <a:r>
+              <a:rPr lang="en-US" dirty="0"/>
+              <a:t>I record this information in the official logbook of the class after the lesson.</a:t>
+            </a:r>
+            <a:endParaRPr lang="en-US" dirty="0"/>
+          </a:p>
+        </p:txBody>
+      </p:sp>
+      <p:sp>
+        <p:nvSpPr>
+          <p:cNvPr id="4" name="Slide Number Placeholder 3"/>
+          <p:cNvSpPr>
+            <a:spLocks noGrp="1"/>
+          </p:cNvSpPr>
+          <p:nvPr>
+            <p:ph type="sldNum" sz="quarter" idx="10"/>
+          </p:nvPr>
+        </p:nvSpPr>
+        <p:spPr/>
+        <p:txBody>
+          <a:bodyPr/>
+          <a:lstStyle/>
+          <a:p>
+            <a:fld id="{F7021451-1387-4CA6-816F-3879F97B5CBC}" type="slidenum">
+              <a:rPr lang="en-US"/>
+              <a:t>46</a:t>
+            </a:fld>
+            <a:endParaRPr lang="en-US"/>
+          </a:p>
+        </p:txBody>
+      </p:sp>
+    </p:spTree>
+    <p:extLst>
+      <p:ext uri="{BB962C8B-B14F-4D97-AF65-F5344CB8AC3E}">
+        <p14:creationId xmlns:p14="http://schemas.microsoft.com/office/powerpoint/2010/main" val="1024086991"/>
+      </p:ext>
+    </p:extLst>
+  </p:cSld>
+  <p:clrMapOvr>
+    <a:masterClrMapping/>
+  </p:clrMapOvr>
+</p:notes>
+</file>
+
+<file path=ppt/notesSlides/notesSlide47.xml><?xml version="1.0" encoding="utf-8"?>
+<p:notes xmlns:a="http://schemas.openxmlformats.org/drawingml/2006/main" xmlns:r="http://schemas.openxmlformats.org/officeDocument/2006/relationships" xmlns:p="http://schemas.openxmlformats.org/presentationml/2006/main">
+  <p:cSld>
+    <p:spTree>
+      <p:nvGrpSpPr>
+        <p:cNvPr id="1" name=""/>
+        <p:cNvGrpSpPr/>
+        <p:nvPr/>
+      </p:nvGrpSpPr>
+      <p:grpSpPr>
+        <a:xfrm>
+          <a:off x="0" y="0"/>
+          <a:ext cx="0" cy="0"/>
+          <a:chOff x="0" y="0"/>
+          <a:chExt cx="0" cy="0"/>
+        </a:xfrm>
+      </p:grpSpPr>
+      <p:sp>
+        <p:nvSpPr>
+          <p:cNvPr id="2" name="Slide Image Placeholder 1"/>
+          <p:cNvSpPr>
+            <a:spLocks noGrp="1" noRot="1" noChangeAspect="1"/>
+          </p:cNvSpPr>
+          <p:nvPr>
+            <p:ph type="sldImg"/>
+          </p:nvPr>
+        </p:nvSpPr>
+        <p:spPr/>
+      </p:sp>
+      <p:sp>
+        <p:nvSpPr>
+          <p:cNvPr id="3" name="Notes Placeholder 2"/>
+          <p:cNvSpPr>
+            <a:spLocks noGrp="1"/>
+          </p:cNvSpPr>
+          <p:nvPr>
+            <p:ph type="body" idx="1"/>
+          </p:nvPr>
+        </p:nvSpPr>
+        <p:spPr/>
+        <p:txBody>
+          <a:bodyPr/>
+          <a:lstStyle/>
+          <a:p>
+            <a:r>
+              <a:rPr lang="en-US" dirty="0"/>
+              <a:t>I complete the second page of the logbook: the matter taught, the evaluation, the homework and the attendance.</a:t>
+            </a:r>
+            <a:endParaRPr lang="en-US" dirty="0"/>
+          </a:p>
+        </p:txBody>
+      </p:sp>
+      <p:sp>
+        <p:nvSpPr>
+          <p:cNvPr id="4" name="Slide Number Placeholder 3"/>
+          <p:cNvSpPr>
+            <a:spLocks noGrp="1"/>
+          </p:cNvSpPr>
+          <p:nvPr>
+            <p:ph type="sldNum" sz="quarter" idx="10"/>
+          </p:nvPr>
+        </p:nvSpPr>
+        <p:spPr/>
+        <p:txBody>
+          <a:bodyPr/>
+          <a:lstStyle/>
+          <a:p>
+            <a:fld id="{F7021451-1387-4CA6-816F-3879F97B5CBC}" type="slidenum">
+              <a:rPr lang="en-US"/>
+              <a:t>47</a:t>
+            </a:fld>
+            <a:endParaRPr lang="en-US"/>
+          </a:p>
+        </p:txBody>
+      </p:sp>
+    </p:spTree>
+    <p:extLst>
+      <p:ext uri="{BB962C8B-B14F-4D97-AF65-F5344CB8AC3E}">
+        <p14:creationId xmlns:p14="http://schemas.microsoft.com/office/powerpoint/2010/main" val="1024086991"/>
+      </p:ext>
+    </p:extLst>
+  </p:cSld>
+  <p:clrMapOvr>
+    <a:masterClrMapping/>
+  </p:clrMapOvr>
+</p:notes>
+</file>
+
+<file path=ppt/notesSlides/notesSlide48.xml><?xml version="1.0" encoding="utf-8"?>
+<p:notes xmlns:a="http://schemas.openxmlformats.org/drawingml/2006/main" xmlns:r="http://schemas.openxmlformats.org/officeDocument/2006/relationships" xmlns:p="http://schemas.openxmlformats.org/presentationml/2006/main">
+  <p:cSld>
+    <p:spTree>
+      <p:nvGrpSpPr>
+        <p:cNvPr id="1" name=""/>
+        <p:cNvGrpSpPr/>
+        <p:nvPr/>
+      </p:nvGrpSpPr>
+      <p:grpSpPr>
+        <a:xfrm>
+          <a:off x="0" y="0"/>
+          <a:ext cx="0" cy="0"/>
+          <a:chOff x="0" y="0"/>
+          <a:chExt cx="0" cy="0"/>
+        </a:xfrm>
+      </p:grpSpPr>
+      <p:sp>
+        <p:nvSpPr>
+          <p:cNvPr id="2" name="Slide Image Placeholder 1"/>
+          <p:cNvSpPr>
+            <a:spLocks noGrp="1" noRot="1" noChangeAspect="1"/>
+          </p:cNvSpPr>
+          <p:nvPr>
+            <p:ph type="sldImg"/>
+          </p:nvPr>
+        </p:nvSpPr>
+        <p:spPr/>
+      </p:sp>
+      <p:sp>
+        <p:nvSpPr>
+          <p:cNvPr id="3" name="Notes Placeholder 2"/>
+          <p:cNvSpPr>
+            <a:spLocks noGrp="1"/>
+          </p:cNvSpPr>
+          <p:nvPr>
+            <p:ph type="body" idx="1"/>
+          </p:nvPr>
+        </p:nvSpPr>
+        <p:spPr/>
+        <p:txBody>
+          <a:bodyPr/>
+          <a:lstStyle/>
+          <a:p>
+            <a:r>
+              <a:rPr lang="en-US" dirty="0"/>
+              <a:t>This slide is for me, the teacher: it gives the timing of the lesson and what to do if the projector is not available.</a:t>
+            </a:r>
+            <a:endParaRPr lang="en-US" dirty="0"/>
+          </a:p>
+        </p:txBody>
+      </p:sp>
+      <p:sp>
+        <p:nvSpPr>
+          <p:cNvPr id="4" name="Slide Number Placeholder 3"/>
+          <p:cNvSpPr>
+            <a:spLocks noGrp="1"/>
+          </p:cNvSpPr>
+          <p:nvPr>
+            <p:ph type="sldNum" sz="quarter" idx="10"/>
+          </p:nvPr>
+        </p:nvSpPr>
+        <p:spPr/>
+        <p:txBody>
+          <a:bodyPr/>
+          <a:lstStyle/>
+          <a:p>
+            <a:fld id="{F7021451-1387-4CA6-816F-3879F97B5CBC}" type="slidenum">
+              <a:rPr lang="en-US"/>
+              <a:t>48</a:t>
+            </a:fld>
+            <a:endParaRPr lang="en-US"/>
+          </a:p>
+        </p:txBody>
+      </p:sp>
+    </p:spTree>
+    <p:extLst>
+      <p:ext uri="{BB962C8B-B14F-4D97-AF65-F5344CB8AC3E}">
+        <p14:creationId xmlns:p14="http://schemas.microsoft.com/office/powerpoint/2010/main" val="1024086991"/>
+      </p:ext>
+    </p:extLst>
+  </p:cSld>
+  <p:clrMapOvr>
+    <a:masterClrMapping/>
+  </p:clrMapOvr>
+</p:notes>
+</file>
+
+<file path=ppt/notesSlides/notesSlide49.xml><?xml version="1.0" encoding="utf-8"?>
+<p:notes xmlns:a="http://schemas.openxmlformats.org/drawingml/2006/main" xmlns:r="http://schemas.openxmlformats.org/officeDocument/2006/relationships" xmlns:p="http://schemas.openxmlformats.org/presentationml/2006/main">
+  <p:cSld>
+    <p:spTree>
+      <p:nvGrpSpPr>
+        <p:cNvPr id="1" name=""/>
+        <p:cNvGrpSpPr/>
+        <p:nvPr/>
+      </p:nvGrpSpPr>
+      <p:grpSpPr>
+        <a:xfrm>
+          <a:off x="0" y="0"/>
+          <a:ext cx="0" cy="0"/>
+          <a:chOff x="0" y="0"/>
+          <a:chExt cx="0" cy="0"/>
+        </a:xfrm>
+      </p:grpSpPr>
+      <p:sp>
+        <p:nvSpPr>
+          <p:cNvPr id="2" name="Slide Image Placeholder 1"/>
+          <p:cNvSpPr>
+            <a:spLocks noGrp="1" noRot="1" noChangeAspect="1"/>
+          </p:cNvSpPr>
+          <p:nvPr>
+            <p:ph type="sldImg"/>
+          </p:nvPr>
+        </p:nvSpPr>
+        <p:spPr/>
+      </p:sp>
+      <p:sp>
+        <p:nvSpPr>
+          <p:cNvPr id="3" name="Notes Placeholder 2"/>
+          <p:cNvSpPr>
+            <a:spLocks noGrp="1"/>
+          </p:cNvSpPr>
+          <p:nvPr>
+            <p:ph type="body" idx="1"/>
+          </p:nvPr>
+        </p:nvSpPr>
+        <p:spPr/>
+        <p:txBody>
+          <a:bodyPr/>
+          <a:lstStyle/>
+          <a:p>
+            <a:r>
+              <a:rPr lang="en-US" dirty="0"/>
+              <a:t>These are the references and picture credits used to prepare this lesson.</a:t>
+            </a:r>
+            <a:endParaRPr lang="en-US" dirty="0"/>
+          </a:p>
+        </p:txBody>
+      </p:sp>
+      <p:sp>
+        <p:nvSpPr>
+          <p:cNvPr id="4" name="Slide Number Placeholder 3"/>
+          <p:cNvSpPr>
+            <a:spLocks noGrp="1"/>
+          </p:cNvSpPr>
+          <p:nvPr>
+            <p:ph type="sldNum" sz="quarter" idx="10"/>
+          </p:nvPr>
+        </p:nvSpPr>
+        <p:spPr/>
+        <p:txBody>
+          <a:bodyPr/>
+          <a:lstStyle/>
+          <a:p>
+            <a:fld id="{F7021451-1387-4CA6-816F-3879F97B5CBC}" type="slidenum">
+              <a:rPr lang="en-US"/>
+              <a:t>49</a:t>
             </a:fld>
             <a:endParaRPr lang="en-US"/>
           </a:p>
@@ -5709,7 +6154,7 @@
         <p:spPr>
           <a:xfrm>
             <a:off x="0" y="658368"/>
-            <a:ext cx="5120640" cy="5833872"/>
+            <a:ext cx="2468880" cy="5833872"/>
           </a:xfrm>
           <a:prstGeom prst="rect">
             <a:avLst/>
@@ -5724,8 +6169,8 @@
         </p:nvSpPr>
         <p:spPr>
           <a:xfrm>
-            <a:off x="5349240" y="1005840"/>
-            <a:ext cx="6522415" cy="731520"/>
+            <a:off x="2697480" y="1005840"/>
+            <a:ext cx="9174175" cy="731520"/>
           </a:xfrm>
           <a:prstGeom prst="rect">
             <a:avLst/>
@@ -5765,8 +6210,8 @@
         </p:nvSpPr>
         <p:spPr>
           <a:xfrm>
-            <a:off x="5349240" y="1783080"/>
-            <a:ext cx="6522415" cy="4663440"/>
+            <a:off x="2697480" y="1783080"/>
+            <a:ext cx="9174175" cy="4663440"/>
           </a:xfrm>
           <a:prstGeom prst="rect">
             <a:avLst/>
@@ -5793,7 +6238,7 @@
                 <a:ea typeface="Times New Roman" pitchFamily="34" charset="-122"/>
                 <a:cs typeface="Times New Roman" pitchFamily="34" charset="-120"/>
               </a:rPr>
-              <a:t>In the dry season, Oumar sees many sandbanks in the Benue at Garoua. The water splits into small channels. He wonders where all this sand comes from.</a:t>
+              <a:t>In the dry season, Oumar sees many sandbanks in the Benue at Garoua, and the water splits into small channels. In the rainy season, the river covers the flat land around it. He asks: "Where does all this sand come from, and what does the river build near its mouth?"</a:t>
             </a:r>
             <a:endParaRPr lang="en-US" sz="4000" dirty="0"/>
           </a:p>
@@ -6231,7 +6676,7 @@
                 <a:ea typeface="Times New Roman" pitchFamily="34" charset="-122"/>
                 <a:cs typeface="Times New Roman" pitchFamily="34" charset="-120"/>
               </a:rPr>
-              <a:t>Oumar does not know where the sandbanks come from.</a:t>
+              <a:t>Oumar does not know where the sand comes from and what landforms the river builds in its lower course.</a:t>
             </a:r>
             <a:endParaRPr lang="en-US" sz="4000" dirty="0"/>
           </a:p>
@@ -6450,7 +6895,7 @@
                 <a:ea typeface="Times New Roman" pitchFamily="34" charset="-122"/>
                 <a:cs typeface="Times New Roman" pitchFamily="34" charset="-120"/>
               </a:rPr>
-              <a:t>What did the river do with its sand?</a:t>
+              <a:t>What does he see in the dry season?</a:t>
             </a:r>
             <a:endParaRPr lang="en-US" sz="4000" dirty="0"/>
           </a:p>
@@ -6669,7 +7114,7 @@
                 <a:ea typeface="Times New Roman" pitchFamily="34" charset="-122"/>
                 <a:cs typeface="Times New Roman" pitchFamily="34" charset="-120"/>
               </a:rPr>
-              <a:t>It dropped it (deposition).</a:t>
+              <a:t>Sandbanks and small channels.</a:t>
             </a:r>
             <a:endParaRPr lang="en-US" sz="4000" dirty="0"/>
           </a:p>
@@ -6888,7 +7333,7 @@
                 <a:ea typeface="Times New Roman" pitchFamily="34" charset="-122"/>
                 <a:cs typeface="Times New Roman" pitchFamily="34" charset="-120"/>
               </a:rPr>
-              <a:t>Why does the river drop its load?</a:t>
+              <a:t>What happens in the rainy season?</a:t>
             </a:r>
             <a:endParaRPr lang="en-US" sz="4000" dirty="0"/>
           </a:p>
@@ -7107,7 +7552,7 @@
                 <a:ea typeface="Times New Roman" pitchFamily="34" charset="-122"/>
                 <a:cs typeface="Times New Roman" pitchFamily="34" charset="-120"/>
               </a:rPr>
-              <a:t>The water is slow and there is less water.</a:t>
+              <a:t>The river floods the flat land around it.</a:t>
             </a:r>
             <a:endParaRPr lang="en-US" sz="4000" dirty="0"/>
           </a:p>
@@ -7657,7 +8102,7 @@
                 <a:ea typeface="Calibri" pitchFamily="34" charset="-122"/>
                 <a:cs typeface="Calibri" pitchFamily="34" charset="-120"/>
               </a:rPr>
-              <a:t>2. FLOODPLAIN</a:t>
+              <a:t>2. LANDFORMS OF THE LOWER COURSE</a:t>
             </a:r>
             <a:endParaRPr lang="en-US" sz="1400" dirty="0"/>
           </a:p>
@@ -7759,7 +8204,7 @@
                 <a:ea typeface="Times New Roman" pitchFamily="34" charset="-122"/>
                 <a:cs typeface="Times New Roman" pitchFamily="34" charset="-120"/>
               </a:rPr>
-              <a:t>Flat land beside a river, covered by flood water.</a:t>
+              <a:t>Flat land beside a river.</a:t>
             </a:r>
             <a:endParaRPr lang="en-US" sz="1800" dirty="0"/>
           </a:p>
@@ -8466,7 +8911,7 @@
                 <a:ea typeface="Calibri" pitchFamily="34" charset="-122"/>
                 <a:cs typeface="Calibri" pitchFamily="34" charset="-120"/>
               </a:rPr>
-              <a:t>2. FLOODPLAIN</a:t>
+              <a:t>2. LANDFORMS OF THE LOWER COURSE</a:t>
             </a:r>
             <a:endParaRPr lang="en-US" sz="1400" dirty="0"/>
           </a:p>
@@ -8573,7 +9018,7 @@
                 <a:ea typeface="Times New Roman" pitchFamily="34" charset="-122"/>
                 <a:cs typeface="Times New Roman" pitchFamily="34" charset="-120"/>
               </a:rPr>
-              <a:t>This flat land is covered by the river in floods. What is it called?</a:t>
+              <a:t>This flat land is covered by the river during floods. What is it called?</a:t>
             </a:r>
             <a:endParaRPr lang="en-US" sz="4000" dirty="0"/>
           </a:p>
@@ -8685,7 +9130,7 @@
                 <a:ea typeface="Calibri" pitchFamily="34" charset="-122"/>
                 <a:cs typeface="Calibri" pitchFamily="34" charset="-120"/>
               </a:rPr>
-              <a:t>2. FLOODPLAIN</a:t>
+              <a:t>2. LANDFORMS OF THE LOWER COURSE</a:t>
             </a:r>
             <a:endParaRPr lang="en-US" sz="1400" dirty="0"/>
           </a:p>
@@ -8904,7 +9349,7 @@
                 <a:ea typeface="Calibri" pitchFamily="34" charset="-122"/>
                 <a:cs typeface="Calibri" pitchFamily="34" charset="-120"/>
               </a:rPr>
-              <a:t>2. OX-BOW LAKE</a:t>
+              <a:t>2. LANDFORMS OF THE LOWER COURSE</a:t>
             </a:r>
             <a:endParaRPr lang="en-US" sz="1400" dirty="0"/>
           </a:p>
@@ -9006,7 +9451,7 @@
                 <a:ea typeface="Times New Roman" pitchFamily="34" charset="-122"/>
                 <a:cs typeface="Times New Roman" pitchFamily="34" charset="-120"/>
               </a:rPr>
-              <a:t>Animation: an ox-bow lake forms.</a:t>
+              <a:t>Animation: the formation of an ox-bow lake.</a:t>
             </a:r>
             <a:endParaRPr lang="en-US" sz="1800" dirty="0"/>
           </a:p>
@@ -9118,7 +9563,7 @@
                 <a:ea typeface="Calibri" pitchFamily="34" charset="-122"/>
                 <a:cs typeface="Calibri" pitchFamily="34" charset="-120"/>
               </a:rPr>
-              <a:t>2. OX-BOW LAKE</a:t>
+              <a:t>2. LANDFORMS OF THE LOWER COURSE</a:t>
             </a:r>
             <a:endParaRPr lang="en-US" sz="1400" dirty="0"/>
           </a:p>
@@ -9337,7 +9782,7 @@
                 <a:ea typeface="Calibri" pitchFamily="34" charset="-122"/>
                 <a:cs typeface="Calibri" pitchFamily="34" charset="-120"/>
               </a:rPr>
-              <a:t>2. OX-BOW LAKE</a:t>
+              <a:t>2. LANDFORMS OF THE LOWER COURSE</a:t>
             </a:r>
             <a:endParaRPr lang="en-US" sz="1400" dirty="0"/>
           </a:p>
@@ -9444,7 +9889,7 @@
                 <a:ea typeface="Times New Roman" pitchFamily="34" charset="-122"/>
                 <a:cs typeface="Times New Roman" pitchFamily="34" charset="-120"/>
               </a:rPr>
-              <a:t>The river cuts through the neck of a meander and leaves the old bend.</a:t>
+              <a:t>The river cuts through the neck of a meander and leaves the old bend as a lake.</a:t>
             </a:r>
             <a:endParaRPr lang="en-US" sz="4000" dirty="0"/>
           </a:p>
@@ -9556,7 +10001,7 @@
                 <a:ea typeface="Calibri" pitchFamily="34" charset="-122"/>
                 <a:cs typeface="Calibri" pitchFamily="34" charset="-120"/>
               </a:rPr>
-              <a:t>2. DELTA</a:t>
+              <a:t>2. LANDFORMS OF THE LOWER COURSE</a:t>
             </a:r>
             <a:endParaRPr lang="en-US" sz="1400" dirty="0"/>
           </a:p>
@@ -9658,7 +10103,7 @@
                 <a:ea typeface="Times New Roman" pitchFamily="34" charset="-122"/>
                 <a:cs typeface="Times New Roman" pitchFamily="34" charset="-120"/>
               </a:rPr>
-              <a:t>The Nile Delta seen from space.</a:t>
+              <a:t>A delta seen from space.</a:t>
             </a:r>
             <a:endParaRPr lang="en-US" sz="1800" dirty="0"/>
           </a:p>
@@ -9770,7 +10215,7 @@
                 <a:ea typeface="Calibri" pitchFamily="34" charset="-122"/>
                 <a:cs typeface="Calibri" pitchFamily="34" charset="-120"/>
               </a:rPr>
-              <a:t>2. DELTA</a:t>
+              <a:t>2. LANDFORMS OF THE LOWER COURSE</a:t>
             </a:r>
             <a:endParaRPr lang="en-US" sz="1400" dirty="0"/>
           </a:p>
@@ -9877,7 +10322,7 @@
                 <a:ea typeface="Times New Roman" pitchFamily="34" charset="-122"/>
                 <a:cs typeface="Times New Roman" pitchFamily="34" charset="-120"/>
               </a:rPr>
-              <a:t>The river drops its load at the sea. What landform is this?</a:t>
+              <a:t>The river drops its load where it enters the sea. What landform does it build?</a:t>
             </a:r>
             <a:endParaRPr lang="en-US" sz="4000" dirty="0"/>
           </a:p>
@@ -9989,7 +10434,7 @@
                 <a:ea typeface="Calibri" pitchFamily="34" charset="-122"/>
                 <a:cs typeface="Calibri" pitchFamily="34" charset="-120"/>
               </a:rPr>
-              <a:t>2. DELTA</a:t>
+              <a:t>2. LANDFORMS OF THE LOWER COURSE</a:t>
             </a:r>
             <a:endParaRPr lang="en-US" sz="1400" dirty="0"/>
           </a:p>
@@ -10532,7 +10977,7 @@
                 <a:ea typeface="Times New Roman" pitchFamily="34" charset="-122"/>
                 <a:cs typeface="Times New Roman" pitchFamily="34" charset="-120"/>
               </a:rPr>
-              <a:t>1. Characteristics of the Lower Course</a:t>
+              <a:t>DEFINITIONS</a:t>
             </a:r>
             <a:endParaRPr lang="en-US" sz="3600" dirty="0"/>
           </a:p>
@@ -10574,7 +11019,7 @@
                 <a:ea typeface="Times New Roman" pitchFamily="34" charset="-122"/>
                 <a:cs typeface="Times New Roman" pitchFamily="34" charset="-120"/>
               </a:rPr>
-              <a:t>The lower course has the following characteristics:</a:t>
+              <a:t>The key terms of this lesson are defined as follows:</a:t>
             </a:r>
             <a:endParaRPr lang="en-US" sz="4000" dirty="0"/>
           </a:p>
@@ -10594,7 +11039,7 @@
                 <a:ea typeface="Times New Roman" pitchFamily="34" charset="-122"/>
                 <a:cs typeface="Times New Roman" pitchFamily="34" charset="-120"/>
               </a:rPr>
-              <a:t>Slope: </a:t>
+              <a:t>Lower course: </a:t>
             </a:r>
             <a:pPr algn="l" indent="0" marL="0">
               <a:spcAft>
@@ -10611,7 +11056,7 @@
                 <a:ea typeface="Times New Roman" pitchFamily="34" charset="-122"/>
                 <a:cs typeface="Times New Roman" pitchFamily="34" charset="-120"/>
               </a:rPr>
-              <a:t>The land is almost flat.</a:t>
+              <a:t>It is the part of a river near its mouth, where the land is almost flat.</a:t>
             </a:r>
             <a:endParaRPr lang="en-US" sz="4000" dirty="0"/>
           </a:p>
@@ -10631,7 +11076,7 @@
                 <a:ea typeface="Times New Roman" pitchFamily="34" charset="-122"/>
                 <a:cs typeface="Times New Roman" pitchFamily="34" charset="-120"/>
               </a:rPr>
-              <a:t>Water: </a:t>
+              <a:t>Deposition: </a:t>
             </a:r>
             <a:pPr algn="l" indent="0" marL="0">
               <a:spcAft>
@@ -10648,44 +11093,7 @@
                 <a:ea typeface="Times New Roman" pitchFamily="34" charset="-122"/>
                 <a:cs typeface="Times New Roman" pitchFamily="34" charset="-120"/>
               </a:rPr>
-              <a:t>The river is wide, deep and slow.</a:t>
-            </a:r>
-            <a:endParaRPr lang="en-US" sz="4000" dirty="0"/>
-          </a:p>
-          <a:p>
-            <a:pPr algn="l" indent="0" marL="0">
-              <a:spcAft>
-                <a:spcPts val="800"/>
-              </a:spcAft>
-              <a:buNone/>
-            </a:pPr>
-            <a:r>
-              <a:rPr lang="en-US" sz="4000" b="1" dirty="0">
-                <a:solidFill>
-                  <a:srgbClr val="111111"/>
-                </a:solidFill>
-                <a:latin typeface="Times New Roman" pitchFamily="34" charset="0"/>
-                <a:ea typeface="Times New Roman" pitchFamily="34" charset="-122"/>
-                <a:cs typeface="Times New Roman" pitchFamily="34" charset="-120"/>
-              </a:rPr>
-              <a:t>Main process: </a:t>
-            </a:r>
-            <a:pPr algn="l" indent="0" marL="0">
-              <a:spcAft>
-                <a:spcPts val="800"/>
-              </a:spcAft>
-              <a:buNone/>
-            </a:pPr>
-            <a:r>
-              <a:rPr lang="en-US" sz="4000" dirty="0">
-                <a:solidFill>
-                  <a:srgbClr val="111111"/>
-                </a:solidFill>
-                <a:latin typeface="Times New Roman" pitchFamily="34" charset="0"/>
-                <a:ea typeface="Times New Roman" pitchFamily="34" charset="-122"/>
-                <a:cs typeface="Times New Roman" pitchFamily="34" charset="-120"/>
-              </a:rPr>
-              <a:t>The river drops much of its load by deposition.</a:t>
+              <a:t>It is the dropping of the load when the river loses energy.</a:t>
             </a:r>
             <a:endParaRPr lang="en-US" sz="4000" dirty="0"/>
           </a:p>
@@ -11829,7 +12237,7 @@
         <p:spPr>
           <a:xfrm>
             <a:off x="0" y="658368"/>
-            <a:ext cx="2468880" cy="5833872"/>
+            <a:ext cx="5120640" cy="5833872"/>
           </a:xfrm>
           <a:prstGeom prst="rect">
             <a:avLst/>
@@ -11844,8 +12252,8 @@
         </p:nvSpPr>
         <p:spPr>
           <a:xfrm>
-            <a:off x="2697480" y="1005840"/>
-            <a:ext cx="9174175" cy="731520"/>
+            <a:off x="5349240" y="1005840"/>
+            <a:ext cx="6522415" cy="731520"/>
           </a:xfrm>
           <a:prstGeom prst="rect">
             <a:avLst/>
@@ -11871,7 +12279,7 @@
                 <a:ea typeface="Times New Roman" pitchFamily="34" charset="-122"/>
                 <a:cs typeface="Times New Roman" pitchFamily="34" charset="-120"/>
               </a:rPr>
-              <a:t>2. Landforms of the Lower Course</a:t>
+              <a:t>DEFINITIONS (continued)</a:t>
             </a:r>
             <a:endParaRPr lang="en-US" sz="3600" dirty="0"/>
           </a:p>
@@ -11885,8 +12293,8 @@
         </p:nvSpPr>
         <p:spPr>
           <a:xfrm>
-            <a:off x="2697480" y="1783080"/>
-            <a:ext cx="9174175" cy="4663440"/>
+            <a:off x="5349240" y="1783080"/>
+            <a:ext cx="6522415" cy="4663440"/>
           </a:xfrm>
           <a:prstGeom prst="rect">
             <a:avLst/>
@@ -11905,7 +12313,7 @@
               <a:buNone/>
             </a:pPr>
             <a:r>
-              <a:rPr lang="en-US" sz="4000" i="1" dirty="0">
+              <a:rPr lang="en-US" sz="4000" b="1" dirty="0">
                 <a:solidFill>
                   <a:srgbClr val="111111"/>
                 </a:solidFill>
@@ -11913,11 +12321,8 @@
                 <a:ea typeface="Times New Roman" pitchFamily="34" charset="-122"/>
                 <a:cs typeface="Times New Roman" pitchFamily="34" charset="-120"/>
               </a:rPr>
-              <a:t>The lower course has the following landforms:</a:t>
-            </a:r>
-            <a:endParaRPr lang="en-US" sz="4000" dirty="0"/>
-          </a:p>
-          <a:p>
+              <a:t>Alluvium: </a:t>
+            </a:r>
             <a:pPr algn="l" indent="0" marL="0">
               <a:spcAft>
                 <a:spcPts val="800"/>
@@ -11925,7 +12330,7 @@
               <a:buNone/>
             </a:pPr>
             <a:r>
-              <a:rPr lang="en-US" sz="4000" b="1" dirty="0">
+              <a:rPr lang="en-US" sz="4000" dirty="0">
                 <a:solidFill>
                   <a:srgbClr val="111111"/>
                 </a:solidFill>
@@ -11933,61 +12338,7 @@
                 <a:ea typeface="Times New Roman" pitchFamily="34" charset="-122"/>
                 <a:cs typeface="Times New Roman" pitchFamily="34" charset="-120"/>
               </a:rPr>
-              <a:t>Floodplain and levees: </a:t>
-            </a:r>
-            <a:pPr algn="l" indent="0" marL="0">
-              <a:spcAft>
-                <a:spcPts val="800"/>
-              </a:spcAft>
-              <a:buNone/>
-            </a:pPr>
-            <a:r>
-              <a:rPr lang="en-US" sz="4000" dirty="0">
-                <a:solidFill>
-                  <a:srgbClr val="111111"/>
-                </a:solidFill>
-                <a:latin typeface="Times New Roman" pitchFamily="34" charset="0"/>
-                <a:ea typeface="Times New Roman" pitchFamily="34" charset="-122"/>
-                <a:cs typeface="Times New Roman" pitchFamily="34" charset="-120"/>
-              </a:rPr>
-              <a:t>They form when the river drops mud on the flat land and on its banks during floods.</a:t>
-            </a:r>
-            <a:endParaRPr lang="en-US" sz="4000" dirty="0"/>
-          </a:p>
-          <a:p>
-            <a:pPr algn="l" indent="0" marL="0">
-              <a:spcAft>
-                <a:spcPts val="800"/>
-              </a:spcAft>
-              <a:buNone/>
-            </a:pPr>
-            <a:r>
-              <a:rPr lang="en-US" sz="4000" b="1" dirty="0">
-                <a:solidFill>
-                  <a:srgbClr val="111111"/>
-                </a:solidFill>
-                <a:latin typeface="Times New Roman" pitchFamily="34" charset="0"/>
-                <a:ea typeface="Times New Roman" pitchFamily="34" charset="-122"/>
-                <a:cs typeface="Times New Roman" pitchFamily="34" charset="-120"/>
-              </a:rPr>
-              <a:t>Ox-bow lake: </a:t>
-            </a:r>
-            <a:pPr algn="l" indent="0" marL="0">
-              <a:spcAft>
-                <a:spcPts val="800"/>
-              </a:spcAft>
-              <a:buNone/>
-            </a:pPr>
-            <a:r>
-              <a:rPr lang="en-US" sz="4000" dirty="0">
-                <a:solidFill>
-                  <a:srgbClr val="111111"/>
-                </a:solidFill>
-                <a:latin typeface="Times New Roman" pitchFamily="34" charset="0"/>
-                <a:ea typeface="Times New Roman" pitchFamily="34" charset="-122"/>
-                <a:cs typeface="Times New Roman" pitchFamily="34" charset="-120"/>
-              </a:rPr>
-              <a:t>It is an old meander cut off from the river.</a:t>
+              <a:t>It is the fine, fertile mud and sand deposited by a river.</a:t>
             </a:r>
             <a:endParaRPr lang="en-US" sz="4000" dirty="0"/>
           </a:p>
@@ -12122,7 +12473,7 @@
         <p:spPr>
           <a:xfrm>
             <a:off x="0" y="658368"/>
-            <a:ext cx="5120640" cy="5833872"/>
+            <a:ext cx="3840480" cy="5833872"/>
           </a:xfrm>
           <a:prstGeom prst="rect">
             <a:avLst/>
@@ -12137,8 +12488,8 @@
         </p:nvSpPr>
         <p:spPr>
           <a:xfrm>
-            <a:off x="5349240" y="1005840"/>
-            <a:ext cx="6522415" cy="731520"/>
+            <a:off x="4069080" y="1005840"/>
+            <a:ext cx="7802575" cy="731520"/>
           </a:xfrm>
           <a:prstGeom prst="rect">
             <a:avLst/>
@@ -12164,7 +12515,7 @@
                 <a:ea typeface="Times New Roman" pitchFamily="34" charset="-122"/>
                 <a:cs typeface="Times New Roman" pitchFamily="34" charset="-120"/>
               </a:rPr>
-              <a:t>2. Landforms of the Lower Course (continued)</a:t>
+              <a:t>1. Main Characteristics and Processes of the Lower Course</a:t>
             </a:r>
             <a:endParaRPr lang="en-US" sz="3600" dirty="0"/>
           </a:p>
@@ -12178,8 +12529,8 @@
         </p:nvSpPr>
         <p:spPr>
           <a:xfrm>
-            <a:off x="5349240" y="1783080"/>
-            <a:ext cx="6522415" cy="4663440"/>
+            <a:off x="4069080" y="1783080"/>
+            <a:ext cx="7802575" cy="4663440"/>
           </a:xfrm>
           <a:prstGeom prst="rect">
             <a:avLst/>
@@ -12198,7 +12549,7 @@
               <a:buNone/>
             </a:pPr>
             <a:r>
-              <a:rPr lang="en-US" sz="4000" b="1" dirty="0">
+              <a:rPr lang="en-US" sz="4000" i="1" dirty="0">
                 <a:solidFill>
                   <a:srgbClr val="111111"/>
                 </a:solidFill>
@@ -12206,8 +12557,11 @@
                 <a:ea typeface="Times New Roman" pitchFamily="34" charset="-122"/>
                 <a:cs typeface="Times New Roman" pitchFamily="34" charset="-120"/>
               </a:rPr>
-              <a:t>Delta: </a:t>
-            </a:r>
+              <a:t>The lower course has the following characteristics and processes:</a:t>
+            </a:r>
+            <a:endParaRPr lang="en-US" sz="4000" dirty="0"/>
+          </a:p>
+          <a:p>
             <a:pPr algn="l" indent="0" marL="0">
               <a:spcAft>
                 <a:spcPts val="800"/>
@@ -12215,7 +12569,7 @@
               <a:buNone/>
             </a:pPr>
             <a:r>
-              <a:rPr lang="en-US" sz="4000" dirty="0">
+              <a:rPr lang="en-US" sz="4000" b="1" dirty="0">
                 <a:solidFill>
                   <a:srgbClr val="111111"/>
                 </a:solidFill>
@@ -12223,11 +12577,8 @@
                 <a:ea typeface="Times New Roman" pitchFamily="34" charset="-122"/>
                 <a:cs typeface="Times New Roman" pitchFamily="34" charset="-120"/>
               </a:rPr>
-              <a:t>It is land built by a river at its mouth, like the deltas of the Nile and the Niger.</a:t>
-            </a:r>
-            <a:endParaRPr lang="en-US" sz="4000" dirty="0"/>
-          </a:p>
-          <a:p>
+              <a:t>Almost flat land: </a:t>
+            </a:r>
             <a:pPr algn="l" indent="0" marL="0">
               <a:spcAft>
                 <a:spcPts val="800"/>
@@ -12235,7 +12586,7 @@
               <a:buNone/>
             </a:pPr>
             <a:r>
-              <a:rPr lang="en-US" sz="4000" b="1" dirty="0">
+              <a:rPr lang="en-US" sz="4000" dirty="0">
                 <a:solidFill>
                   <a:srgbClr val="111111"/>
                 </a:solidFill>
@@ -12243,8 +12594,11 @@
                 <a:ea typeface="Times New Roman" pitchFamily="34" charset="-122"/>
                 <a:cs typeface="Times New Roman" pitchFamily="34" charset="-120"/>
               </a:rPr>
-              <a:t>Braided channels: </a:t>
-            </a:r>
+              <a:t>The slope is very gentle, so the river flows slowly.</a:t>
+            </a:r>
+            <a:endParaRPr lang="en-US" sz="4000" dirty="0"/>
+          </a:p>
+          <a:p>
             <a:pPr algn="l" indent="0" marL="0">
               <a:spcAft>
                 <a:spcPts val="800"/>
@@ -12252,7 +12606,7 @@
               <a:buNone/>
             </a:pPr>
             <a:r>
-              <a:rPr lang="en-US" sz="4000" dirty="0">
+              <a:rPr lang="en-US" sz="4000" b="1" dirty="0">
                 <a:solidFill>
                   <a:srgbClr val="111111"/>
                 </a:solidFill>
@@ -12260,7 +12614,24 @@
                 <a:ea typeface="Times New Roman" pitchFamily="34" charset="-122"/>
                 <a:cs typeface="Times New Roman" pitchFamily="34" charset="-120"/>
               </a:rPr>
-              <a:t>They form when sandbanks split the river into many channels.</a:t>
+              <a:t>Wide, deep channel: </a:t>
+            </a:r>
+            <a:pPr algn="l" indent="0" marL="0">
+              <a:spcAft>
+                <a:spcPts val="800"/>
+              </a:spcAft>
+              <a:buNone/>
+            </a:pPr>
+            <a:r>
+              <a:rPr lang="en-US" sz="4000" dirty="0">
+                <a:solidFill>
+                  <a:srgbClr val="111111"/>
+                </a:solidFill>
+                <a:latin typeface="Times New Roman" pitchFamily="34" charset="0"/>
+                <a:ea typeface="Times New Roman" pitchFamily="34" charset="-122"/>
+                <a:cs typeface="Times New Roman" pitchFamily="34" charset="-120"/>
+              </a:rPr>
+              <a:t>The river has its greatest volume of water.</a:t>
             </a:r>
             <a:endParaRPr lang="en-US" sz="4000" dirty="0"/>
           </a:p>
@@ -12378,48 +12749,9 @@
           </a:p>
         </p:txBody>
       </p:sp>
-      <p:sp>
-        <p:nvSpPr>
-          <p:cNvPr id="3" name="Text 1"/>
-          <p:cNvSpPr/>
-          <p:nvPr/>
-        </p:nvSpPr>
-        <p:spPr>
-          <a:xfrm>
-            <a:off x="457200" y="1005840"/>
-            <a:ext cx="11277295" cy="731520"/>
-          </a:xfrm>
-          <a:prstGeom prst="rect">
-            <a:avLst/>
-          </a:prstGeom>
-          <a:noFill/>
-          <a:ln/>
-        </p:spPr>
-        <p:txBody>
-          <a:bodyPr wrap="square" lIns="0" tIns="0" rIns="0" bIns="0" rtlCol="0" anchor="ctr"/>
-          <a:lstStyle/>
-          <a:p>
-            <a:pPr algn="ctr" indent="0" marL="0">
-              <a:buNone/>
-            </a:pPr>
-            <a:r>
-              <a:rPr lang="en-US" sz="3600" b="1" dirty="0">
-                <a:solidFill>
-                  <a:srgbClr val="990011"/>
-                </a:solidFill>
-                <a:latin typeface="Times New Roman" pitchFamily="34" charset="0"/>
-                <a:ea typeface="Times New Roman" pitchFamily="34" charset="-122"/>
-                <a:cs typeface="Times New Roman" pitchFamily="34" charset="-120"/>
-              </a:rPr>
-              <a:t>2. Landforms of the Lower Course</a:t>
-            </a:r>
-            <a:endParaRPr lang="en-US" sz="3600" dirty="0"/>
-          </a:p>
-        </p:txBody>
-      </p:sp>
       <p:pic>
         <p:nvPicPr>
-          <p:cNvPr id="4" name="Image 0" descr="/home/claude/f4/img/v2/oxbow_last.png">    </p:cNvPr>
+          <p:cNvPr id="3" name="Image 0" descr="/home/claude/f4/img/minesec_sheet.png">    </p:cNvPr>
           <p:cNvPicPr>
             <a:picLocks noChangeAspect="1"/>
           </p:cNvPicPr>
@@ -12433,8 +12765,8 @@
         </p:blipFill>
         <p:spPr>
           <a:xfrm>
-            <a:off x="629930" y="1783080"/>
-            <a:ext cx="10931835" cy="4270248"/>
+            <a:off x="0" y="658368"/>
+            <a:ext cx="5120640" cy="5833872"/>
           </a:xfrm>
           <a:prstGeom prst="rect">
             <a:avLst/>
@@ -12443,14 +12775,14 @@
       </p:pic>
       <p:sp>
         <p:nvSpPr>
-          <p:cNvPr id="5" name="Text 2"/>
+          <p:cNvPr id="4" name="Text 1"/>
           <p:cNvSpPr/>
           <p:nvPr/>
         </p:nvSpPr>
         <p:spPr>
           <a:xfrm>
-            <a:off x="457200" y="6089904"/>
-            <a:ext cx="11277295" cy="347472"/>
+            <a:off x="5349240" y="1005840"/>
+            <a:ext cx="6522415" cy="731520"/>
           </a:xfrm>
           <a:prstGeom prst="rect">
             <a:avLst/>
@@ -12459,24 +12791,122 @@
           <a:ln/>
         </p:spPr>
         <p:txBody>
-          <a:bodyPr wrap="square" lIns="0" tIns="0" rIns="0" bIns="0" rtlCol="0" anchor="ctr"/>
+          <a:bodyPr wrap="square" lIns="0" tIns="0" rIns="0" bIns="0" rtlCol="0" anchor="ctr">
+            <a:normAutofit/>
+          </a:bodyPr>
           <a:lstStyle/>
           <a:p>
             <a:pPr algn="ctr" indent="0" marL="0">
               <a:buNone/>
             </a:pPr>
             <a:r>
-              <a:rPr lang="en-US" sz="1800" i="1" dirty="0">
-                <a:solidFill>
-                  <a:srgbClr val="555555"/>
+              <a:rPr lang="en-US" sz="3600" b="1" dirty="0">
+                <a:solidFill>
+                  <a:srgbClr val="990011"/>
                 </a:solidFill>
                 <a:latin typeface="Times New Roman" pitchFamily="34" charset="0"/>
                 <a:ea typeface="Times New Roman" pitchFamily="34" charset="-122"/>
                 <a:cs typeface="Times New Roman" pitchFamily="34" charset="-120"/>
               </a:rPr>
-              <a:t>Illustration: formation of an ox-bow lake</a:t>
-            </a:r>
-            <a:endParaRPr lang="en-US" sz="1800" dirty="0"/>
+              <a:t>1. Main Characteristics and Processes of the Lower Course (continued)</a:t>
+            </a:r>
+            <a:endParaRPr lang="en-US" sz="3600" dirty="0"/>
+          </a:p>
+        </p:txBody>
+      </p:sp>
+      <p:sp>
+        <p:nvSpPr>
+          <p:cNvPr id="5" name="Text 2"/>
+          <p:cNvSpPr/>
+          <p:nvPr/>
+        </p:nvSpPr>
+        <p:spPr>
+          <a:xfrm>
+            <a:off x="5349240" y="1783080"/>
+            <a:ext cx="6522415" cy="4663440"/>
+          </a:xfrm>
+          <a:prstGeom prst="rect">
+            <a:avLst/>
+          </a:prstGeom>
+          <a:noFill/>
+          <a:ln/>
+        </p:spPr>
+        <p:txBody>
+          <a:bodyPr wrap="square" lIns="0" tIns="0" rIns="0" bIns="0" rtlCol="0" anchor="t"/>
+          <a:lstStyle/>
+          <a:p>
+            <a:pPr algn="l" indent="0" marL="0">
+              <a:spcAft>
+                <a:spcPts val="800"/>
+              </a:spcAft>
+              <a:buNone/>
+            </a:pPr>
+            <a:r>
+              <a:rPr lang="en-US" sz="4000" b="1" dirty="0">
+                <a:solidFill>
+                  <a:srgbClr val="111111"/>
+                </a:solidFill>
+                <a:latin typeface="Times New Roman" pitchFamily="34" charset="0"/>
+                <a:ea typeface="Times New Roman" pitchFamily="34" charset="-122"/>
+                <a:cs typeface="Times New Roman" pitchFamily="34" charset="-120"/>
+              </a:rPr>
+              <a:t>Fine load: </a:t>
+            </a:r>
+            <a:pPr algn="l" indent="0" marL="0">
+              <a:spcAft>
+                <a:spcPts val="800"/>
+              </a:spcAft>
+              <a:buNone/>
+            </a:pPr>
+            <a:r>
+              <a:rPr lang="en-US" sz="4000" dirty="0">
+                <a:solidFill>
+                  <a:srgbClr val="111111"/>
+                </a:solidFill>
+                <a:latin typeface="Times New Roman" pitchFamily="34" charset="0"/>
+                <a:ea typeface="Times New Roman" pitchFamily="34" charset="-122"/>
+                <a:cs typeface="Times New Roman" pitchFamily="34" charset="-120"/>
+              </a:rPr>
+              <a:t>The river carries mainly fine mud and sand in suspension.</a:t>
+            </a:r>
+            <a:endParaRPr lang="en-US" sz="4000" dirty="0"/>
+          </a:p>
+          <a:p>
+            <a:pPr algn="l" indent="0" marL="0">
+              <a:spcAft>
+                <a:spcPts val="800"/>
+              </a:spcAft>
+              <a:buNone/>
+            </a:pPr>
+            <a:r>
+              <a:rPr lang="en-US" sz="4000" b="1" dirty="0">
+                <a:solidFill>
+                  <a:srgbClr val="111111"/>
+                </a:solidFill>
+                <a:latin typeface="Times New Roman" pitchFamily="34" charset="0"/>
+                <a:ea typeface="Times New Roman" pitchFamily="34" charset="-122"/>
+                <a:cs typeface="Times New Roman" pitchFamily="34" charset="-120"/>
+              </a:rPr>
+              <a:t>Deposition: </a:t>
+            </a:r>
+            <a:pPr algn="l" indent="0" marL="0">
+              <a:spcAft>
+                <a:spcPts val="800"/>
+              </a:spcAft>
+              <a:buNone/>
+            </a:pPr>
+            <a:r>
+              <a:rPr lang="en-US" sz="4000" dirty="0">
+                <a:solidFill>
+                  <a:srgbClr val="111111"/>
+                </a:solidFill>
+                <a:latin typeface="Times New Roman" pitchFamily="34" charset="0"/>
+                <a:ea typeface="Times New Roman" pitchFamily="34" charset="-122"/>
+                <a:cs typeface="Times New Roman" pitchFamily="34" charset="-120"/>
+              </a:rPr>
+              <a:t>The slow river drops much of its load, especially during floods and at its mouth.</a:t>
+            </a:r>
+            <a:endParaRPr lang="en-US" sz="4000" dirty="0"/>
           </a:p>
         </p:txBody>
       </p:sp>
@@ -12586,15 +13016,135 @@
                 <a:ea typeface="Calibri" pitchFamily="34" charset="-122"/>
                 <a:cs typeface="Calibri" pitchFamily="34" charset="-120"/>
               </a:rPr>
-              <a:t>FORMATIVE EVALUATION</a:t>
+              <a:t>BOARD SUMMARY</a:t>
             </a:r>
             <a:endParaRPr lang="en-US" sz="1400" dirty="0"/>
+          </a:p>
+        </p:txBody>
+      </p:sp>
+      <p:sp>
+        <p:nvSpPr>
+          <p:cNvPr id="3" name="Text 1"/>
+          <p:cNvSpPr/>
+          <p:nvPr/>
+        </p:nvSpPr>
+        <p:spPr>
+          <a:xfrm>
+            <a:off x="365760" y="1005840"/>
+            <a:ext cx="11460175" cy="731520"/>
+          </a:xfrm>
+          <a:prstGeom prst="rect">
+            <a:avLst/>
+          </a:prstGeom>
+          <a:noFill/>
+          <a:ln/>
+        </p:spPr>
+        <p:txBody>
+          <a:bodyPr wrap="square" lIns="0" tIns="0" rIns="0" bIns="0" rtlCol="0" anchor="ctr">
+            <a:normAutofit/>
+          </a:bodyPr>
+          <a:lstStyle/>
+          <a:p>
+            <a:pPr algn="ctr" indent="0" marL="0">
+              <a:buNone/>
+            </a:pPr>
+            <a:r>
+              <a:rPr lang="en-US" sz="3600" b="1" dirty="0">
+                <a:solidFill>
+                  <a:srgbClr val="990011"/>
+                </a:solidFill>
+                <a:latin typeface="Times New Roman" pitchFamily="34" charset="0"/>
+                <a:ea typeface="Times New Roman" pitchFamily="34" charset="-122"/>
+                <a:cs typeface="Times New Roman" pitchFamily="34" charset="-120"/>
+              </a:rPr>
+              <a:t>2. Landforms of the Lower Course</a:t>
+            </a:r>
+            <a:endParaRPr lang="en-US" sz="3600" dirty="0"/>
+          </a:p>
+        </p:txBody>
+      </p:sp>
+      <p:sp>
+        <p:nvSpPr>
+          <p:cNvPr id="4" name="Text 2"/>
+          <p:cNvSpPr/>
+          <p:nvPr/>
+        </p:nvSpPr>
+        <p:spPr>
+          <a:xfrm>
+            <a:off x="365760" y="1783080"/>
+            <a:ext cx="4846320" cy="4617720"/>
+          </a:xfrm>
+          <a:prstGeom prst="rect">
+            <a:avLst/>
+          </a:prstGeom>
+          <a:noFill/>
+          <a:ln/>
+        </p:spPr>
+        <p:txBody>
+          <a:bodyPr wrap="square" lIns="0" tIns="0" rIns="0" bIns="0" rtlCol="0" anchor="t"/>
+          <a:lstStyle/>
+          <a:p>
+            <a:pPr algn="l" indent="0" marL="0">
+              <a:spcAft>
+                <a:spcPts val="800"/>
+              </a:spcAft>
+              <a:buNone/>
+            </a:pPr>
+            <a:r>
+              <a:rPr lang="en-US" sz="3600" i="1" dirty="0">
+                <a:solidFill>
+                  <a:srgbClr val="111111"/>
+                </a:solidFill>
+                <a:latin typeface="Times New Roman" pitchFamily="34" charset="0"/>
+                <a:ea typeface="Times New Roman" pitchFamily="34" charset="-122"/>
+                <a:cs typeface="Times New Roman" pitchFamily="34" charset="-120"/>
+              </a:rPr>
+              <a:t>The lower course has the following landforms:</a:t>
+            </a:r>
+            <a:endParaRPr lang="en-US" sz="3600" dirty="0"/>
+          </a:p>
+          <a:p>
+            <a:pPr algn="l" indent="0" marL="0">
+              <a:spcAft>
+                <a:spcPts val="800"/>
+              </a:spcAft>
+              <a:buNone/>
+            </a:pPr>
+            <a:r>
+              <a:rPr lang="en-US" sz="3600" b="1" dirty="0">
+                <a:solidFill>
+                  <a:srgbClr val="111111"/>
+                </a:solidFill>
+                <a:latin typeface="Times New Roman" pitchFamily="34" charset="0"/>
+                <a:ea typeface="Times New Roman" pitchFamily="34" charset="-122"/>
+                <a:cs typeface="Times New Roman" pitchFamily="34" charset="-120"/>
+              </a:rPr>
+              <a:t>Floodplain: </a:t>
+            </a:r>
+            <a:pPr algn="l" indent="0" marL="0">
+              <a:spcAft>
+                <a:spcPts val="800"/>
+              </a:spcAft>
+              <a:buNone/>
+            </a:pPr>
+            <a:r>
+              <a:rPr lang="en-US" sz="3600" dirty="0">
+                <a:solidFill>
+                  <a:srgbClr val="111111"/>
+                </a:solidFill>
+                <a:latin typeface="Times New Roman" pitchFamily="34" charset="0"/>
+                <a:ea typeface="Times New Roman" pitchFamily="34" charset="-122"/>
+                <a:cs typeface="Times New Roman" pitchFamily="34" charset="-120"/>
+              </a:rPr>
+              <a:t>It is the wide, flat land beside the river, built by layers of alluvium dropped during floods.</a:t>
+            </a:r>
+            <a:endParaRPr lang="en-US" sz="3600" dirty="0"/>
           </a:p>
         </p:txBody>
       </p:sp>
       <p:pic>
         <p:nvPicPr>
-          <p:cNvPr id="3" name="Image 0" descr="/home/claude/f4/img/minesec_sheet.png">    </p:cNvPr>
+          <p:cNvPr id="5" name="Image 0" descr="/home/claude/f4/img/v2/f4_floodplain.jpg">    </p:cNvPr>
           <p:cNvPicPr>
             <a:picLocks noChangeAspect="1"/>
           </p:cNvPicPr>
@@ -12608,8 +13158,8 @@
         </p:blipFill>
         <p:spPr>
           <a:xfrm>
-            <a:off x="0" y="658368"/>
-            <a:ext cx="5120640" cy="5833872"/>
+            <a:off x="5349240" y="2071212"/>
+            <a:ext cx="6659575" cy="3693983"/>
           </a:xfrm>
           <a:prstGeom prst="rect">
             <a:avLst/>
@@ -12618,14 +13168,14 @@
       </p:pic>
       <p:sp>
         <p:nvSpPr>
-          <p:cNvPr id="4" name="Text 1"/>
+          <p:cNvPr id="6" name="Text 3"/>
           <p:cNvSpPr/>
           <p:nvPr/>
         </p:nvSpPr>
         <p:spPr>
           <a:xfrm>
-            <a:off x="5349240" y="1005840"/>
-            <a:ext cx="6522415" cy="731520"/>
+            <a:off x="5349240" y="6089904"/>
+            <a:ext cx="6659575" cy="347472"/>
           </a:xfrm>
           <a:prstGeom prst="rect">
             <a:avLst/>
@@ -12634,68 +13184,24 @@
           <a:ln/>
         </p:spPr>
         <p:txBody>
-          <a:bodyPr wrap="square" lIns="0" tIns="0" rIns="0" bIns="0" rtlCol="0" anchor="ctr">
-            <a:normAutofit/>
-          </a:bodyPr>
+          <a:bodyPr wrap="square" lIns="0" tIns="0" rIns="0" bIns="0" rtlCol="0" anchor="ctr"/>
           <a:lstStyle/>
           <a:p>
             <a:pPr algn="ctr" indent="0" marL="0">
               <a:buNone/>
             </a:pPr>
             <a:r>
-              <a:rPr lang="en-US" sz="3600" b="1" dirty="0">
-                <a:solidFill>
-                  <a:srgbClr val="990011"/>
+              <a:rPr lang="en-US" sz="1600" i="1" dirty="0">
+                <a:solidFill>
+                  <a:srgbClr val="555555"/>
                 </a:solidFill>
                 <a:latin typeface="Times New Roman" pitchFamily="34" charset="0"/>
                 <a:ea typeface="Times New Roman" pitchFamily="34" charset="-122"/>
                 <a:cs typeface="Times New Roman" pitchFamily="34" charset="-120"/>
               </a:rPr>
-              <a:t>Evaluation 1</a:t>
-            </a:r>
-            <a:endParaRPr lang="en-US" sz="3600" dirty="0"/>
-          </a:p>
-        </p:txBody>
-      </p:sp>
-      <p:sp>
-        <p:nvSpPr>
-          <p:cNvPr id="5" name="Text 2"/>
-          <p:cNvSpPr/>
-          <p:nvPr/>
-        </p:nvSpPr>
-        <p:spPr>
-          <a:xfrm>
-            <a:off x="5349240" y="1783080"/>
-            <a:ext cx="6522415" cy="4663440"/>
-          </a:xfrm>
-          <a:prstGeom prst="rect">
-            <a:avLst/>
-          </a:prstGeom>
-          <a:noFill/>
-          <a:ln/>
-        </p:spPr>
-        <p:txBody>
-          <a:bodyPr wrap="square" lIns="0" tIns="0" rIns="0" bIns="0" rtlCol="0" anchor="t"/>
-          <a:lstStyle/>
-          <a:p>
-            <a:pPr algn="l" indent="0" marL="0">
-              <a:spcAft>
-                <a:spcPts val="800"/>
-              </a:spcAft>
-              <a:buNone/>
-            </a:pPr>
-            <a:r>
-              <a:rPr lang="en-US" sz="4000" dirty="0">
-                <a:solidFill>
-                  <a:srgbClr val="111111"/>
-                </a:solidFill>
-                <a:latin typeface="Times New Roman" pitchFamily="34" charset="0"/>
-                <a:ea typeface="Times New Roman" pitchFamily="34" charset="-122"/>
-                <a:cs typeface="Times New Roman" pitchFamily="34" charset="-120"/>
-              </a:rPr>
-              <a:t>What is the main work of the river in its lower course?</a:t>
-            </a:r>
-            <a:endParaRPr lang="en-US" sz="4000" dirty="0"/>
+              <a:t>Illustration: a floodplain</a:t>
+            </a:r>
+            <a:endParaRPr lang="en-US" sz="1600" dirty="0"/>
           </a:p>
         </p:txBody>
       </p:sp>
@@ -12805,15 +13311,115 @@
                 <a:ea typeface="Calibri" pitchFamily="34" charset="-122"/>
                 <a:cs typeface="Calibri" pitchFamily="34" charset="-120"/>
               </a:rPr>
-              <a:t>FORMATIVE EVALUATION</a:t>
+              <a:t>BOARD SUMMARY</a:t>
             </a:r>
             <a:endParaRPr lang="en-US" sz="1400" dirty="0"/>
+          </a:p>
+        </p:txBody>
+      </p:sp>
+      <p:sp>
+        <p:nvSpPr>
+          <p:cNvPr id="3" name="Text 1"/>
+          <p:cNvSpPr/>
+          <p:nvPr/>
+        </p:nvSpPr>
+        <p:spPr>
+          <a:xfrm>
+            <a:off x="365760" y="1005840"/>
+            <a:ext cx="11460175" cy="731520"/>
+          </a:xfrm>
+          <a:prstGeom prst="rect">
+            <a:avLst/>
+          </a:prstGeom>
+          <a:noFill/>
+          <a:ln/>
+        </p:spPr>
+        <p:txBody>
+          <a:bodyPr wrap="square" lIns="0" tIns="0" rIns="0" bIns="0" rtlCol="0" anchor="ctr">
+            <a:normAutofit/>
+          </a:bodyPr>
+          <a:lstStyle/>
+          <a:p>
+            <a:pPr algn="ctr" indent="0" marL="0">
+              <a:buNone/>
+            </a:pPr>
+            <a:r>
+              <a:rPr lang="en-US" sz="3600" b="1" dirty="0">
+                <a:solidFill>
+                  <a:srgbClr val="990011"/>
+                </a:solidFill>
+                <a:latin typeface="Times New Roman" pitchFamily="34" charset="0"/>
+                <a:ea typeface="Times New Roman" pitchFamily="34" charset="-122"/>
+                <a:cs typeface="Times New Roman" pitchFamily="34" charset="-120"/>
+              </a:rPr>
+              <a:t>2. Landforms of the Lower Course</a:t>
+            </a:r>
+            <a:endParaRPr lang="en-US" sz="3600" dirty="0"/>
+          </a:p>
+        </p:txBody>
+      </p:sp>
+      <p:sp>
+        <p:nvSpPr>
+          <p:cNvPr id="4" name="Text 2"/>
+          <p:cNvSpPr/>
+          <p:nvPr/>
+        </p:nvSpPr>
+        <p:spPr>
+          <a:xfrm>
+            <a:off x="365760" y="1783080"/>
+            <a:ext cx="4846320" cy="4617720"/>
+          </a:xfrm>
+          <a:prstGeom prst="rect">
+            <a:avLst/>
+          </a:prstGeom>
+          <a:noFill/>
+          <a:ln/>
+        </p:spPr>
+        <p:txBody>
+          <a:bodyPr wrap="square" lIns="0" tIns="0" rIns="0" bIns="0" rtlCol="0" anchor="t"/>
+          <a:lstStyle/>
+          <a:p>
+            <a:pPr algn="l" indent="0" marL="0">
+              <a:spcAft>
+                <a:spcPts val="800"/>
+              </a:spcAft>
+              <a:buNone/>
+            </a:pPr>
+            <a:r>
+              <a:rPr lang="en-US" sz="3600" b="1" dirty="0">
+                <a:solidFill>
+                  <a:srgbClr val="111111"/>
+                </a:solidFill>
+                <a:latin typeface="Times New Roman" pitchFamily="34" charset="0"/>
+                <a:ea typeface="Times New Roman" pitchFamily="34" charset="-122"/>
+                <a:cs typeface="Times New Roman" pitchFamily="34" charset="-120"/>
+              </a:rPr>
+              <a:t>Levees: </a:t>
+            </a:r>
+            <a:pPr algn="l" indent="0" marL="0">
+              <a:spcAft>
+                <a:spcPts val="800"/>
+              </a:spcAft>
+              <a:buNone/>
+            </a:pPr>
+            <a:r>
+              <a:rPr lang="en-US" sz="3600" dirty="0">
+                <a:solidFill>
+                  <a:srgbClr val="111111"/>
+                </a:solidFill>
+                <a:latin typeface="Times New Roman" pitchFamily="34" charset="0"/>
+                <a:ea typeface="Times New Roman" pitchFamily="34" charset="-122"/>
+                <a:cs typeface="Times New Roman" pitchFamily="34" charset="-120"/>
+              </a:rPr>
+              <a:t>They are raised banks built when the river drops its coarsest load next to the channel during floods.</a:t>
+            </a:r>
+            <a:endParaRPr lang="en-US" sz="3600" dirty="0"/>
           </a:p>
         </p:txBody>
       </p:sp>
       <p:pic>
         <p:nvPicPr>
-          <p:cNvPr id="3" name="Image 0" descr="/home/claude/f4/img/minesec_sheet.png">    </p:cNvPr>
+          <p:cNvPr id="5" name="Image 0" descr="/home/claude/f4/img/levee_delta.png">    </p:cNvPr>
           <p:cNvPicPr>
             <a:picLocks noChangeAspect="1"/>
           </p:cNvPicPr>
@@ -12827,8 +13433,8 @@
         </p:blipFill>
         <p:spPr>
           <a:xfrm>
-            <a:off x="0" y="658368"/>
-            <a:ext cx="5120640" cy="5833872"/>
+            <a:off x="5349240" y="2424299"/>
+            <a:ext cx="6659575" cy="2987809"/>
           </a:xfrm>
           <a:prstGeom prst="rect">
             <a:avLst/>
@@ -12837,14 +13443,14 @@
       </p:pic>
       <p:sp>
         <p:nvSpPr>
-          <p:cNvPr id="4" name="Text 1"/>
+          <p:cNvPr id="6" name="Text 3"/>
           <p:cNvSpPr/>
           <p:nvPr/>
         </p:nvSpPr>
         <p:spPr>
           <a:xfrm>
-            <a:off x="5349240" y="1005840"/>
-            <a:ext cx="6522415" cy="731520"/>
+            <a:off x="5349240" y="6089904"/>
+            <a:ext cx="6659575" cy="347472"/>
           </a:xfrm>
           <a:prstGeom prst="rect">
             <a:avLst/>
@@ -12853,68 +13459,24 @@
           <a:ln/>
         </p:spPr>
         <p:txBody>
-          <a:bodyPr wrap="square" lIns="0" tIns="0" rIns="0" bIns="0" rtlCol="0" anchor="ctr">
-            <a:normAutofit/>
-          </a:bodyPr>
+          <a:bodyPr wrap="square" lIns="0" tIns="0" rIns="0" bIns="0" rtlCol="0" anchor="ctr"/>
           <a:lstStyle/>
           <a:p>
             <a:pPr algn="ctr" indent="0" marL="0">
               <a:buNone/>
             </a:pPr>
             <a:r>
-              <a:rPr lang="en-US" sz="3600" b="1" dirty="0">
-                <a:solidFill>
-                  <a:srgbClr val="990011"/>
+              <a:rPr lang="en-US" sz="1600" i="1" dirty="0">
+                <a:solidFill>
+                  <a:srgbClr val="555555"/>
                 </a:solidFill>
                 <a:latin typeface="Times New Roman" pitchFamily="34" charset="0"/>
                 <a:ea typeface="Times New Roman" pitchFamily="34" charset="-122"/>
                 <a:cs typeface="Times New Roman" pitchFamily="34" charset="-120"/>
               </a:rPr>
-              <a:t>Expected Answer</a:t>
-            </a:r>
-            <a:endParaRPr lang="en-US" sz="3600" dirty="0"/>
-          </a:p>
-        </p:txBody>
-      </p:sp>
-      <p:sp>
-        <p:nvSpPr>
-          <p:cNvPr id="5" name="Text 2"/>
-          <p:cNvSpPr/>
-          <p:nvPr/>
-        </p:nvSpPr>
-        <p:spPr>
-          <a:xfrm>
-            <a:off x="5349240" y="1783080"/>
-            <a:ext cx="6522415" cy="4663440"/>
-          </a:xfrm>
-          <a:prstGeom prst="rect">
-            <a:avLst/>
-          </a:prstGeom>
-          <a:noFill/>
-          <a:ln/>
-        </p:spPr>
-        <p:txBody>
-          <a:bodyPr wrap="square" lIns="0" tIns="0" rIns="0" bIns="0" rtlCol="0" anchor="t"/>
-          <a:lstStyle/>
-          <a:p>
-            <a:pPr algn="l" indent="0" marL="0">
-              <a:spcAft>
-                <a:spcPts val="800"/>
-              </a:spcAft>
-              <a:buNone/>
-            </a:pPr>
-            <a:r>
-              <a:rPr lang="en-US" sz="4000" dirty="0">
-                <a:solidFill>
-                  <a:srgbClr val="111111"/>
-                </a:solidFill>
-                <a:latin typeface="Times New Roman" pitchFamily="34" charset="0"/>
-                <a:ea typeface="Times New Roman" pitchFamily="34" charset="-122"/>
-                <a:cs typeface="Times New Roman" pitchFamily="34" charset="-120"/>
-              </a:rPr>
-              <a:t>Deposition.</a:t>
-            </a:r>
-            <a:endParaRPr lang="en-US" sz="4000" dirty="0"/>
+              <a:t>Illustration: levees, floodplain and delta</a:t>
+            </a:r>
+            <a:endParaRPr lang="en-US" sz="1600" dirty="0"/>
           </a:p>
         </p:txBody>
       </p:sp>
@@ -13024,15 +13586,115 @@
                 <a:ea typeface="Calibri" pitchFamily="34" charset="-122"/>
                 <a:cs typeface="Calibri" pitchFamily="34" charset="-120"/>
               </a:rPr>
-              <a:t>FORMATIVE EVALUATION</a:t>
+              <a:t>BOARD SUMMARY</a:t>
             </a:r>
             <a:endParaRPr lang="en-US" sz="1400" dirty="0"/>
+          </a:p>
+        </p:txBody>
+      </p:sp>
+      <p:sp>
+        <p:nvSpPr>
+          <p:cNvPr id="3" name="Text 1"/>
+          <p:cNvSpPr/>
+          <p:nvPr/>
+        </p:nvSpPr>
+        <p:spPr>
+          <a:xfrm>
+            <a:off x="365760" y="1005840"/>
+            <a:ext cx="11460175" cy="731520"/>
+          </a:xfrm>
+          <a:prstGeom prst="rect">
+            <a:avLst/>
+          </a:prstGeom>
+          <a:noFill/>
+          <a:ln/>
+        </p:spPr>
+        <p:txBody>
+          <a:bodyPr wrap="square" lIns="0" tIns="0" rIns="0" bIns="0" rtlCol="0" anchor="ctr">
+            <a:normAutofit/>
+          </a:bodyPr>
+          <a:lstStyle/>
+          <a:p>
+            <a:pPr algn="ctr" indent="0" marL="0">
+              <a:buNone/>
+            </a:pPr>
+            <a:r>
+              <a:rPr lang="en-US" sz="3600" b="1" dirty="0">
+                <a:solidFill>
+                  <a:srgbClr val="990011"/>
+                </a:solidFill>
+                <a:latin typeface="Times New Roman" pitchFamily="34" charset="0"/>
+                <a:ea typeface="Times New Roman" pitchFamily="34" charset="-122"/>
+                <a:cs typeface="Times New Roman" pitchFamily="34" charset="-120"/>
+              </a:rPr>
+              <a:t>2. Landforms of the Lower Course</a:t>
+            </a:r>
+            <a:endParaRPr lang="en-US" sz="3600" dirty="0"/>
+          </a:p>
+        </p:txBody>
+      </p:sp>
+      <p:sp>
+        <p:nvSpPr>
+          <p:cNvPr id="4" name="Text 2"/>
+          <p:cNvSpPr/>
+          <p:nvPr/>
+        </p:nvSpPr>
+        <p:spPr>
+          <a:xfrm>
+            <a:off x="365760" y="1783080"/>
+            <a:ext cx="4846320" cy="4617720"/>
+          </a:xfrm>
+          <a:prstGeom prst="rect">
+            <a:avLst/>
+          </a:prstGeom>
+          <a:noFill/>
+          <a:ln/>
+        </p:spPr>
+        <p:txBody>
+          <a:bodyPr wrap="square" lIns="0" tIns="0" rIns="0" bIns="0" rtlCol="0" anchor="t"/>
+          <a:lstStyle/>
+          <a:p>
+            <a:pPr algn="l" indent="0" marL="0">
+              <a:spcAft>
+                <a:spcPts val="800"/>
+              </a:spcAft>
+              <a:buNone/>
+            </a:pPr>
+            <a:r>
+              <a:rPr lang="en-US" sz="3600" b="1" dirty="0">
+                <a:solidFill>
+                  <a:srgbClr val="111111"/>
+                </a:solidFill>
+                <a:latin typeface="Times New Roman" pitchFamily="34" charset="0"/>
+                <a:ea typeface="Times New Roman" pitchFamily="34" charset="-122"/>
+                <a:cs typeface="Times New Roman" pitchFamily="34" charset="-120"/>
+              </a:rPr>
+              <a:t>Ox-bow lake: </a:t>
+            </a:r>
+            <a:pPr algn="l" indent="0" marL="0">
+              <a:spcAft>
+                <a:spcPts val="800"/>
+              </a:spcAft>
+              <a:buNone/>
+            </a:pPr>
+            <a:r>
+              <a:rPr lang="en-US" sz="3600" dirty="0">
+                <a:solidFill>
+                  <a:srgbClr val="111111"/>
+                </a:solidFill>
+                <a:latin typeface="Times New Roman" pitchFamily="34" charset="0"/>
+                <a:ea typeface="Times New Roman" pitchFamily="34" charset="-122"/>
+                <a:cs typeface="Times New Roman" pitchFamily="34" charset="-120"/>
+              </a:rPr>
+              <a:t>It is an old meander cut off from the river when a flood cuts through its neck.</a:t>
+            </a:r>
+            <a:endParaRPr lang="en-US" sz="3600" dirty="0"/>
           </a:p>
         </p:txBody>
       </p:sp>
       <p:pic>
         <p:nvPicPr>
-          <p:cNvPr id="3" name="Image 0" descr="/home/claude/f4/img/minesec_sheet.png">    </p:cNvPr>
+          <p:cNvPr id="5" name="Image 0" descr="/home/claude/f4/img/v2/oxbow_last.png">    </p:cNvPr>
           <p:cNvPicPr>
             <a:picLocks noChangeAspect="1"/>
           </p:cNvPicPr>
@@ -13046,8 +13708,8 @@
         </p:blipFill>
         <p:spPr>
           <a:xfrm>
-            <a:off x="0" y="658368"/>
-            <a:ext cx="5120640" cy="5833872"/>
+            <a:off x="5349240" y="2617506"/>
+            <a:ext cx="6659575" cy="2601397"/>
           </a:xfrm>
           <a:prstGeom prst="rect">
             <a:avLst/>
@@ -13056,14 +13718,14 @@
       </p:pic>
       <p:sp>
         <p:nvSpPr>
-          <p:cNvPr id="4" name="Text 1"/>
+          <p:cNvPr id="6" name="Text 3"/>
           <p:cNvSpPr/>
           <p:nvPr/>
         </p:nvSpPr>
         <p:spPr>
           <a:xfrm>
-            <a:off x="5349240" y="1005840"/>
-            <a:ext cx="6522415" cy="731520"/>
+            <a:off x="5349240" y="6089904"/>
+            <a:ext cx="6659575" cy="347472"/>
           </a:xfrm>
           <a:prstGeom prst="rect">
             <a:avLst/>
@@ -13072,68 +13734,24 @@
           <a:ln/>
         </p:spPr>
         <p:txBody>
-          <a:bodyPr wrap="square" lIns="0" tIns="0" rIns="0" bIns="0" rtlCol="0" anchor="ctr">
-            <a:normAutofit/>
-          </a:bodyPr>
+          <a:bodyPr wrap="square" lIns="0" tIns="0" rIns="0" bIns="0" rtlCol="0" anchor="ctr"/>
           <a:lstStyle/>
           <a:p>
             <a:pPr algn="ctr" indent="0" marL="0">
               <a:buNone/>
             </a:pPr>
             <a:r>
-              <a:rPr lang="en-US" sz="3600" b="1" dirty="0">
-                <a:solidFill>
-                  <a:srgbClr val="990011"/>
+              <a:rPr lang="en-US" sz="1600" i="1" dirty="0">
+                <a:solidFill>
+                  <a:srgbClr val="555555"/>
                 </a:solidFill>
                 <a:latin typeface="Times New Roman" pitchFamily="34" charset="0"/>
                 <a:ea typeface="Times New Roman" pitchFamily="34" charset="-122"/>
                 <a:cs typeface="Times New Roman" pitchFamily="34" charset="-120"/>
               </a:rPr>
-              <a:t>Evaluation 2</a:t>
-            </a:r>
-            <a:endParaRPr lang="en-US" sz="3600" dirty="0"/>
-          </a:p>
-        </p:txBody>
-      </p:sp>
-      <p:sp>
-        <p:nvSpPr>
-          <p:cNvPr id="5" name="Text 2"/>
-          <p:cNvSpPr/>
-          <p:nvPr/>
-        </p:nvSpPr>
-        <p:spPr>
-          <a:xfrm>
-            <a:off x="5349240" y="1783080"/>
-            <a:ext cx="6522415" cy="4663440"/>
-          </a:xfrm>
-          <a:prstGeom prst="rect">
-            <a:avLst/>
-          </a:prstGeom>
-          <a:noFill/>
-          <a:ln/>
-        </p:spPr>
-        <p:txBody>
-          <a:bodyPr wrap="square" lIns="0" tIns="0" rIns="0" bIns="0" rtlCol="0" anchor="t"/>
-          <a:lstStyle/>
-          <a:p>
-            <a:pPr algn="l" indent="0" marL="0">
-              <a:spcAft>
-                <a:spcPts val="800"/>
-              </a:spcAft>
-              <a:buNone/>
-            </a:pPr>
-            <a:r>
-              <a:rPr lang="en-US" sz="4000" dirty="0">
-                <a:solidFill>
-                  <a:srgbClr val="111111"/>
-                </a:solidFill>
-                <a:latin typeface="Times New Roman" pitchFamily="34" charset="0"/>
-                <a:ea typeface="Times New Roman" pitchFamily="34" charset="-122"/>
-                <a:cs typeface="Times New Roman" pitchFamily="34" charset="-120"/>
-              </a:rPr>
-              <a:t>Give one example of a delta.</a:t>
-            </a:r>
-            <a:endParaRPr lang="en-US" sz="4000" dirty="0"/>
+              <a:t>Illustration: formation of an ox-bow lake</a:t>
+            </a:r>
+            <a:endParaRPr lang="en-US" sz="1600" dirty="0"/>
           </a:p>
         </p:txBody>
       </p:sp>
@@ -13243,15 +13861,115 @@
                 <a:ea typeface="Calibri" pitchFamily="34" charset="-122"/>
                 <a:cs typeface="Calibri" pitchFamily="34" charset="-120"/>
               </a:rPr>
-              <a:t>FORMATIVE EVALUATION</a:t>
+              <a:t>BOARD SUMMARY</a:t>
             </a:r>
             <a:endParaRPr lang="en-US" sz="1400" dirty="0"/>
+          </a:p>
+        </p:txBody>
+      </p:sp>
+      <p:sp>
+        <p:nvSpPr>
+          <p:cNvPr id="3" name="Text 1"/>
+          <p:cNvSpPr/>
+          <p:nvPr/>
+        </p:nvSpPr>
+        <p:spPr>
+          <a:xfrm>
+            <a:off x="365760" y="1005840"/>
+            <a:ext cx="11460175" cy="731520"/>
+          </a:xfrm>
+          <a:prstGeom prst="rect">
+            <a:avLst/>
+          </a:prstGeom>
+          <a:noFill/>
+          <a:ln/>
+        </p:spPr>
+        <p:txBody>
+          <a:bodyPr wrap="square" lIns="0" tIns="0" rIns="0" bIns="0" rtlCol="0" anchor="ctr">
+            <a:normAutofit/>
+          </a:bodyPr>
+          <a:lstStyle/>
+          <a:p>
+            <a:pPr algn="ctr" indent="0" marL="0">
+              <a:buNone/>
+            </a:pPr>
+            <a:r>
+              <a:rPr lang="en-US" sz="3600" b="1" dirty="0">
+                <a:solidFill>
+                  <a:srgbClr val="990011"/>
+                </a:solidFill>
+                <a:latin typeface="Times New Roman" pitchFamily="34" charset="0"/>
+                <a:ea typeface="Times New Roman" pitchFamily="34" charset="-122"/>
+                <a:cs typeface="Times New Roman" pitchFamily="34" charset="-120"/>
+              </a:rPr>
+              <a:t>2. Landforms of the Lower Course</a:t>
+            </a:r>
+            <a:endParaRPr lang="en-US" sz="3600" dirty="0"/>
+          </a:p>
+        </p:txBody>
+      </p:sp>
+      <p:sp>
+        <p:nvSpPr>
+          <p:cNvPr id="4" name="Text 2"/>
+          <p:cNvSpPr/>
+          <p:nvPr/>
+        </p:nvSpPr>
+        <p:spPr>
+          <a:xfrm>
+            <a:off x="365760" y="1783080"/>
+            <a:ext cx="4846320" cy="4617720"/>
+          </a:xfrm>
+          <a:prstGeom prst="rect">
+            <a:avLst/>
+          </a:prstGeom>
+          <a:noFill/>
+          <a:ln/>
+        </p:spPr>
+        <p:txBody>
+          <a:bodyPr wrap="square" lIns="0" tIns="0" rIns="0" bIns="0" rtlCol="0" anchor="t"/>
+          <a:lstStyle/>
+          <a:p>
+            <a:pPr algn="l" indent="0" marL="0">
+              <a:spcAft>
+                <a:spcPts val="800"/>
+              </a:spcAft>
+              <a:buNone/>
+            </a:pPr>
+            <a:r>
+              <a:rPr lang="en-US" sz="3600" b="1" dirty="0">
+                <a:solidFill>
+                  <a:srgbClr val="111111"/>
+                </a:solidFill>
+                <a:latin typeface="Times New Roman" pitchFamily="34" charset="0"/>
+                <a:ea typeface="Times New Roman" pitchFamily="34" charset="-122"/>
+                <a:cs typeface="Times New Roman" pitchFamily="34" charset="-120"/>
+              </a:rPr>
+              <a:t>Delta: </a:t>
+            </a:r>
+            <a:pPr algn="l" indent="0" marL="0">
+              <a:spcAft>
+                <a:spcPts val="800"/>
+              </a:spcAft>
+              <a:buNone/>
+            </a:pPr>
+            <a:r>
+              <a:rPr lang="en-US" sz="3600" dirty="0">
+                <a:solidFill>
+                  <a:srgbClr val="111111"/>
+                </a:solidFill>
+                <a:latin typeface="Times New Roman" pitchFamily="34" charset="0"/>
+                <a:ea typeface="Times New Roman" pitchFamily="34" charset="-122"/>
+                <a:cs typeface="Times New Roman" pitchFamily="34" charset="-120"/>
+              </a:rPr>
+              <a:t>It is a flat, fan-shaped land built by a river at its mouth, like the deltas of the Nile and the Niger.</a:t>
+            </a:r>
+            <a:endParaRPr lang="en-US" sz="3600" dirty="0"/>
           </a:p>
         </p:txBody>
       </p:sp>
       <p:pic>
         <p:nvPicPr>
-          <p:cNvPr id="3" name="Image 0" descr="/home/claude/f4/img/minesec_sheet.png">    </p:cNvPr>
+          <p:cNvPr id="5" name="Image 0" descr="/home/claude/f4/img/v2/f4_delta.jpg">    </p:cNvPr>
           <p:cNvPicPr>
             <a:picLocks noChangeAspect="1"/>
           </p:cNvPicPr>
@@ -13265,8 +13983,8 @@
         </p:blipFill>
         <p:spPr>
           <a:xfrm>
-            <a:off x="0" y="658368"/>
-            <a:ext cx="5120640" cy="5833872"/>
+            <a:off x="5349240" y="2071212"/>
+            <a:ext cx="6659575" cy="3693983"/>
           </a:xfrm>
           <a:prstGeom prst="rect">
             <a:avLst/>
@@ -13275,14 +13993,14 @@
       </p:pic>
       <p:sp>
         <p:nvSpPr>
-          <p:cNvPr id="4" name="Text 1"/>
+          <p:cNvPr id="6" name="Text 3"/>
           <p:cNvSpPr/>
           <p:nvPr/>
         </p:nvSpPr>
         <p:spPr>
           <a:xfrm>
-            <a:off x="5349240" y="1005840"/>
-            <a:ext cx="6522415" cy="731520"/>
+            <a:off x="5349240" y="6089904"/>
+            <a:ext cx="6659575" cy="347472"/>
           </a:xfrm>
           <a:prstGeom prst="rect">
             <a:avLst/>
@@ -13291,68 +14009,24 @@
           <a:ln/>
         </p:spPr>
         <p:txBody>
-          <a:bodyPr wrap="square" lIns="0" tIns="0" rIns="0" bIns="0" rtlCol="0" anchor="ctr">
-            <a:normAutofit/>
-          </a:bodyPr>
+          <a:bodyPr wrap="square" lIns="0" tIns="0" rIns="0" bIns="0" rtlCol="0" anchor="ctr"/>
           <a:lstStyle/>
           <a:p>
             <a:pPr algn="ctr" indent="0" marL="0">
               <a:buNone/>
             </a:pPr>
             <a:r>
-              <a:rPr lang="en-US" sz="3600" b="1" dirty="0">
-                <a:solidFill>
-                  <a:srgbClr val="990011"/>
+              <a:rPr lang="en-US" sz="1600" i="1" dirty="0">
+                <a:solidFill>
+                  <a:srgbClr val="555555"/>
                 </a:solidFill>
                 <a:latin typeface="Times New Roman" pitchFamily="34" charset="0"/>
                 <a:ea typeface="Times New Roman" pitchFamily="34" charset="-122"/>
                 <a:cs typeface="Times New Roman" pitchFamily="34" charset="-120"/>
               </a:rPr>
-              <a:t>Expected Answer</a:t>
-            </a:r>
-            <a:endParaRPr lang="en-US" sz="3600" dirty="0"/>
-          </a:p>
-        </p:txBody>
-      </p:sp>
-      <p:sp>
-        <p:nvSpPr>
-          <p:cNvPr id="5" name="Text 2"/>
-          <p:cNvSpPr/>
-          <p:nvPr/>
-        </p:nvSpPr>
-        <p:spPr>
-          <a:xfrm>
-            <a:off x="5349240" y="1783080"/>
-            <a:ext cx="6522415" cy="4663440"/>
-          </a:xfrm>
-          <a:prstGeom prst="rect">
-            <a:avLst/>
-          </a:prstGeom>
-          <a:noFill/>
-          <a:ln/>
-        </p:spPr>
-        <p:txBody>
-          <a:bodyPr wrap="square" lIns="0" tIns="0" rIns="0" bIns="0" rtlCol="0" anchor="t"/>
-          <a:lstStyle/>
-          <a:p>
-            <a:pPr algn="l" indent="0" marL="0">
-              <a:spcAft>
-                <a:spcPts val="800"/>
-              </a:spcAft>
-              <a:buNone/>
-            </a:pPr>
-            <a:r>
-              <a:rPr lang="en-US" sz="4000" dirty="0">
-                <a:solidFill>
-                  <a:srgbClr val="111111"/>
-                </a:solidFill>
-                <a:latin typeface="Times New Roman" pitchFamily="34" charset="0"/>
-                <a:ea typeface="Times New Roman" pitchFamily="34" charset="-122"/>
-                <a:cs typeface="Times New Roman" pitchFamily="34" charset="-120"/>
-              </a:rPr>
-              <a:t>The Nile Delta (or the Niger Delta).</a:t>
-            </a:r>
-            <a:endParaRPr lang="en-US" sz="4000" dirty="0"/>
+              <a:t>Illustration: a delta</a:t>
+            </a:r>
+            <a:endParaRPr lang="en-US" sz="1600" dirty="0"/>
           </a:p>
         </p:txBody>
       </p:sp>
@@ -13462,7 +14136,7 @@
                 <a:ea typeface="Calibri" pitchFamily="34" charset="-122"/>
                 <a:cs typeface="Calibri" pitchFamily="34" charset="-120"/>
               </a:rPr>
-              <a:t>REMEDIATION</a:t>
+              <a:t>BOARD SUMMARY</a:t>
             </a:r>
             <a:endParaRPr lang="en-US" sz="1400" dirty="0"/>
           </a:p>
@@ -13485,7 +14159,7 @@
         <p:spPr>
           <a:xfrm>
             <a:off x="0" y="658368"/>
-            <a:ext cx="1463040" cy="5833872"/>
+            <a:ext cx="5120640" cy="5833872"/>
           </a:xfrm>
           <a:prstGeom prst="rect">
             <a:avLst/>
@@ -13500,8 +14174,8 @@
         </p:nvSpPr>
         <p:spPr>
           <a:xfrm>
-            <a:off x="1691640" y="1005840"/>
-            <a:ext cx="10180015" cy="731520"/>
+            <a:off x="5349240" y="1005840"/>
+            <a:ext cx="6522415" cy="731520"/>
           </a:xfrm>
           <a:prstGeom prst="rect">
             <a:avLst/>
@@ -13527,7 +14201,7 @@
                 <a:ea typeface="Times New Roman" pitchFamily="34" charset="-122"/>
                 <a:cs typeface="Times New Roman" pitchFamily="34" charset="-120"/>
               </a:rPr>
-              <a:t>Remediation</a:t>
+              <a:t>2. Landforms of the Lower Course</a:t>
             </a:r>
             <a:endParaRPr lang="en-US" sz="3600" dirty="0"/>
           </a:p>
@@ -13541,8 +14215,8 @@
         </p:nvSpPr>
         <p:spPr>
           <a:xfrm>
-            <a:off x="1691640" y="1783080"/>
-            <a:ext cx="10180015" cy="4663440"/>
+            <a:off x="5349240" y="1783080"/>
+            <a:ext cx="6522415" cy="4663440"/>
           </a:xfrm>
           <a:prstGeom prst="rect">
             <a:avLst/>
@@ -13569,18 +14243,13 @@
                 <a:ea typeface="Times New Roman" pitchFamily="34" charset="-122"/>
                 <a:cs typeface="Times New Roman" pitchFamily="34" charset="-120"/>
               </a:rPr>
-              <a:t>Fill in the blanks:</a:t>
-            </a:r>
-            <a:endParaRPr lang="en-US" sz="4000" dirty="0"/>
-          </a:p>
-          <a:p>
-            <a:pPr algn="l" marL="342900" indent="-342900">
+              <a:t>Braided channels: </a:t>
+            </a:r>
+            <a:pPr algn="l" indent="0" marL="0">
               <a:spcAft>
                 <a:spcPts val="800"/>
               </a:spcAft>
-              <a:buSzPct val="100000"/>
-              <a:buFont typeface="+mj-lt"/>
-              <a:buAutoNum type="arabicPeriod" startAt="1"/>
+              <a:buNone/>
             </a:pPr>
             <a:r>
               <a:rPr lang="en-US" sz="4000" dirty="0">
@@ -13591,51 +14260,7 @@
                 <a:ea typeface="Times New Roman" pitchFamily="34" charset="-122"/>
                 <a:cs typeface="Times New Roman" pitchFamily="34" charset="-120"/>
               </a:rPr>
-              <a:t>Flat land covered by floods is a ______.</a:t>
-            </a:r>
-            <a:endParaRPr lang="en-US" sz="4000" dirty="0"/>
-          </a:p>
-          <a:p>
-            <a:pPr algn="l" marL="342900" indent="-342900">
-              <a:spcAft>
-                <a:spcPts val="800"/>
-              </a:spcAft>
-              <a:buSzPct val="100000"/>
-              <a:buFont typeface="+mj-lt"/>
-              <a:buAutoNum type="arabicPeriod" startAt="1"/>
-            </a:pPr>
-            <a:r>
-              <a:rPr lang="en-US" sz="4000" dirty="0">
-                <a:solidFill>
-                  <a:srgbClr val="111111"/>
-                </a:solidFill>
-                <a:latin typeface="Times New Roman" pitchFamily="34" charset="0"/>
-                <a:ea typeface="Times New Roman" pitchFamily="34" charset="-122"/>
-                <a:cs typeface="Times New Roman" pitchFamily="34" charset="-120"/>
-              </a:rPr>
-              <a:t>An old meander cut off is an ______ lake.</a:t>
-            </a:r>
-            <a:endParaRPr lang="en-US" sz="4000" dirty="0"/>
-          </a:p>
-          <a:p>
-            <a:pPr algn="l" marL="342900" indent="-342900">
-              <a:spcAft>
-                <a:spcPts val="800"/>
-              </a:spcAft>
-              <a:buSzPct val="100000"/>
-              <a:buFont typeface="+mj-lt"/>
-              <a:buAutoNum type="arabicPeriod" startAt="1"/>
-            </a:pPr>
-            <a:r>
-              <a:rPr lang="en-US" sz="4000" dirty="0">
-                <a:solidFill>
-                  <a:srgbClr val="111111"/>
-                </a:solidFill>
-                <a:latin typeface="Times New Roman" pitchFamily="34" charset="0"/>
-                <a:ea typeface="Times New Roman" pitchFamily="34" charset="-122"/>
-                <a:cs typeface="Times New Roman" pitchFamily="34" charset="-120"/>
-              </a:rPr>
-              <a:t>Land made by a river at its mouth is a ______.</a:t>
+              <a:t>They form when sandbanks split the river into many small channels, as on the Benue in the dry season.</a:t>
             </a:r>
             <a:endParaRPr lang="en-US" sz="4000" dirty="0"/>
           </a:p>
@@ -13747,7 +14372,7 @@
                 <a:ea typeface="Calibri" pitchFamily="34" charset="-122"/>
                 <a:cs typeface="Calibri" pitchFamily="34" charset="-120"/>
               </a:rPr>
-              <a:t>HOMEWORK</a:t>
+              <a:t>FORMATIVE EVALUATION</a:t>
             </a:r>
             <a:endParaRPr lang="en-US" sz="1400" dirty="0"/>
           </a:p>
@@ -13812,7 +14437,7 @@
                 <a:ea typeface="Times New Roman" pitchFamily="34" charset="-122"/>
                 <a:cs typeface="Times New Roman" pitchFamily="34" charset="-120"/>
               </a:rPr>
-              <a:t>Homework</a:t>
+              <a:t>Evaluation 1</a:t>
             </a:r>
             <a:endParaRPr lang="en-US" sz="3600" dirty="0"/>
           </a:p>
@@ -13854,7 +14479,7 @@
                 <a:ea typeface="Times New Roman" pitchFamily="34" charset="-122"/>
                 <a:cs typeface="Times New Roman" pitchFamily="34" charset="-120"/>
               </a:rPr>
-              <a:t>Ask two people who live or farm near the Benue: what are the advantages of the river, and what problems do the floods cause? Write their answers.</a:t>
+              <a:t>What is the main work of the river in its lower course?</a:t>
             </a:r>
             <a:endParaRPr lang="en-US" sz="4000" dirty="0"/>
           </a:p>
@@ -13966,7 +14591,7 @@
                 <a:ea typeface="Calibri" pitchFamily="34" charset="-122"/>
                 <a:cs typeface="Calibri" pitchFamily="34" charset="-120"/>
               </a:rPr>
-              <a:t>NEXT LESSON</a:t>
+              <a:t>FORMATIVE EVALUATION</a:t>
             </a:r>
             <a:endParaRPr lang="en-US" sz="1400" dirty="0"/>
           </a:p>
@@ -14031,7 +14656,7 @@
                 <a:ea typeface="Times New Roman" pitchFamily="34" charset="-122"/>
                 <a:cs typeface="Times New Roman" pitchFamily="34" charset="-120"/>
               </a:rPr>
-              <a:t>Next Lesson</a:t>
+              <a:t>Expected Answer</a:t>
             </a:r>
             <a:endParaRPr lang="en-US" sz="3600" dirty="0"/>
           </a:p>
@@ -14055,17 +14680,17 @@
           <a:ln/>
         </p:spPr>
         <p:txBody>
-          <a:bodyPr wrap="square" lIns="0" tIns="0" rIns="0" bIns="0" rtlCol="0" anchor="ctr"/>
-          <a:lstStyle/>
-          <a:p>
-            <a:pPr algn="ctr" indent="0" marL="0">
+          <a:bodyPr wrap="square" lIns="0" tIns="0" rIns="0" bIns="0" rtlCol="0" anchor="t"/>
+          <a:lstStyle/>
+          <a:p>
+            <a:pPr algn="l" indent="0" marL="0">
               <a:spcAft>
                 <a:spcPts val="800"/>
               </a:spcAft>
               <a:buNone/>
             </a:pPr>
             <a:r>
-              <a:rPr lang="en-US" sz="4000" b="1" dirty="0">
+              <a:rPr lang="en-US" sz="4000" dirty="0">
                 <a:solidFill>
                   <a:srgbClr val="111111"/>
                 </a:solidFill>
@@ -14073,27 +14698,7 @@
                 <a:ea typeface="Times New Roman" pitchFamily="34" charset="-122"/>
                 <a:cs typeface="Times New Roman" pitchFamily="34" charset="-120"/>
               </a:rPr>
-              <a:t>Our next lesson will be on:</a:t>
-            </a:r>
-            <a:endParaRPr lang="en-US" sz="4000" dirty="0"/>
-          </a:p>
-          <a:p>
-            <a:pPr algn="ctr" indent="0" marL="0">
-              <a:spcAft>
-                <a:spcPts val="800"/>
-              </a:spcAft>
-              <a:buNone/>
-            </a:pPr>
-            <a:r>
-              <a:rPr lang="en-US" sz="4000" b="1" dirty="0">
-                <a:solidFill>
-                  <a:srgbClr val="990011"/>
-                </a:solidFill>
-                <a:latin typeface="Times New Roman" pitchFamily="34" charset="0"/>
-                <a:ea typeface="Times New Roman" pitchFamily="34" charset="-122"/>
-                <a:cs typeface="Times New Roman" pitchFamily="34" charset="-120"/>
-              </a:rPr>
-              <a:t>Lesson 22: Man and Floodplain Interactions</a:t>
+              <a:t>Deposition.</a:t>
             </a:r>
             <a:endParaRPr lang="en-US" sz="4000" dirty="0"/>
           </a:p>
@@ -14444,6 +15049,1187 @@
                 <a:ea typeface="Calibri" pitchFamily="34" charset="-122"/>
                 <a:cs typeface="Calibri" pitchFamily="34" charset="-120"/>
               </a:rPr>
+              <a:t>FORMATIVE EVALUATION</a:t>
+            </a:r>
+            <a:endParaRPr lang="en-US" sz="1400" dirty="0"/>
+          </a:p>
+        </p:txBody>
+      </p:sp>
+      <p:pic>
+        <p:nvPicPr>
+          <p:cNvPr id="3" name="Image 0" descr="/home/claude/f4/img/minesec_sheet.png">    </p:cNvPr>
+          <p:cNvPicPr>
+            <a:picLocks noChangeAspect="1"/>
+          </p:cNvPicPr>
+          <p:nvPr/>
+        </p:nvPicPr>
+        <p:blipFill>
+          <a:blip r:embed="rId1"/>
+          <a:stretch>
+            <a:fillRect/>
+          </a:stretch>
+        </p:blipFill>
+        <p:spPr>
+          <a:xfrm>
+            <a:off x="0" y="658368"/>
+            <a:ext cx="5120640" cy="5833872"/>
+          </a:xfrm>
+          <a:prstGeom prst="rect">
+            <a:avLst/>
+          </a:prstGeom>
+        </p:spPr>
+      </p:pic>
+      <p:sp>
+        <p:nvSpPr>
+          <p:cNvPr id="4" name="Text 1"/>
+          <p:cNvSpPr/>
+          <p:nvPr/>
+        </p:nvSpPr>
+        <p:spPr>
+          <a:xfrm>
+            <a:off x="5349240" y="1005840"/>
+            <a:ext cx="6522415" cy="731520"/>
+          </a:xfrm>
+          <a:prstGeom prst="rect">
+            <a:avLst/>
+          </a:prstGeom>
+          <a:noFill/>
+          <a:ln/>
+        </p:spPr>
+        <p:txBody>
+          <a:bodyPr wrap="square" lIns="0" tIns="0" rIns="0" bIns="0" rtlCol="0" anchor="ctr">
+            <a:normAutofit/>
+          </a:bodyPr>
+          <a:lstStyle/>
+          <a:p>
+            <a:pPr algn="ctr" indent="0" marL="0">
+              <a:buNone/>
+            </a:pPr>
+            <a:r>
+              <a:rPr lang="en-US" sz="3600" b="1" dirty="0">
+                <a:solidFill>
+                  <a:srgbClr val="990011"/>
+                </a:solidFill>
+                <a:latin typeface="Times New Roman" pitchFamily="34" charset="0"/>
+                <a:ea typeface="Times New Roman" pitchFamily="34" charset="-122"/>
+                <a:cs typeface="Times New Roman" pitchFamily="34" charset="-120"/>
+              </a:rPr>
+              <a:t>Evaluation 2</a:t>
+            </a:r>
+            <a:endParaRPr lang="en-US" sz="3600" dirty="0"/>
+          </a:p>
+        </p:txBody>
+      </p:sp>
+      <p:sp>
+        <p:nvSpPr>
+          <p:cNvPr id="5" name="Text 2"/>
+          <p:cNvSpPr/>
+          <p:nvPr/>
+        </p:nvSpPr>
+        <p:spPr>
+          <a:xfrm>
+            <a:off x="5349240" y="1783080"/>
+            <a:ext cx="6522415" cy="4663440"/>
+          </a:xfrm>
+          <a:prstGeom prst="rect">
+            <a:avLst/>
+          </a:prstGeom>
+          <a:noFill/>
+          <a:ln/>
+        </p:spPr>
+        <p:txBody>
+          <a:bodyPr wrap="square" lIns="0" tIns="0" rIns="0" bIns="0" rtlCol="0" anchor="t"/>
+          <a:lstStyle/>
+          <a:p>
+            <a:pPr algn="l" indent="0" marL="0">
+              <a:spcAft>
+                <a:spcPts val="800"/>
+              </a:spcAft>
+              <a:buNone/>
+            </a:pPr>
+            <a:r>
+              <a:rPr lang="en-US" sz="4000" dirty="0">
+                <a:solidFill>
+                  <a:srgbClr val="111111"/>
+                </a:solidFill>
+                <a:latin typeface="Times New Roman" pitchFamily="34" charset="0"/>
+                <a:ea typeface="Times New Roman" pitchFamily="34" charset="-122"/>
+                <a:cs typeface="Times New Roman" pitchFamily="34" charset="-120"/>
+              </a:rPr>
+              <a:t>Give one example of a delta.</a:t>
+            </a:r>
+            <a:endParaRPr lang="en-US" sz="4000" dirty="0"/>
+          </a:p>
+        </p:txBody>
+      </p:sp>
+      <p:sp>
+        <p:nvSpPr>
+          <p:cNvPr id="25" name="Slide Number Placeholder 0"/>
+          <p:cNvSpPr>
+            <a:spLocks noGrp="1"/>
+          </p:cNvSpPr>
+          <p:nvPr>
+            <p:ph type="sldNum" sz="quarter" idx="4294967295"/>
+          </p:nvPr>
+        </p:nvSpPr>
+        <p:spPr>
+          <a:xfrm>
+            <a:off x="27432" y="91440"/>
+            <a:ext cx="585216" cy="475488"/>
+          </a:xfrm>
+          <a:prstGeom prst="rect">
+            <a:avLst/>
+          </a:prstGeom>
+          <a:extLst>
+            <a:ext uri="{C572A759-6A51-4108-AA02-DFA0A04FC94B}">
+              <ma14:wrappingTextBoxFlag xmlns:ma14="http://schemas.microsoft.com/office/mac/drawingml/2011/main" val="0"/>
+            </a:ext>
+          </a:extLst>
+        </p:spPr>
+        <p:txBody>
+          <a:bodyPr/>
+          <a:lstStyle>
+            <a:lvl1pPr>
+              <a:defRPr sz="2000">
+                <a:solidFill>
+                  <a:srgbClr val="FFFFFF"/>
+                </a:solidFill>
+                <a:latin typeface="Calibri"/>
+                <a:ea typeface="Calibri"/>
+                <a:cs typeface="Calibri"/>
+              </a:defRPr>
+            </a:lvl1pPr>
+          </a:lstStyle>
+          <a:p>
+            <a:pPr algn="ctr"/>
+            <a:fld id="{F7021451-1387-4CA6-816F-3879F97B5CBC}" type="slidenum">
+              <a:rPr b="1" lang="en-US"/>
+              <a:t>40</a:t>
+            </a:fld>
+            <a:endParaRPr lang="en-US"/>
+          </a:p>
+        </p:txBody>
+      </p:sp>
+    </p:spTree>
+  </p:cSld>
+  <p:clrMapOvr>
+    <a:masterClrMapping/>
+  </p:clrMapOvr>
+</p:sld>
+</file>
+
+<file path=ppt/slides/slide41.xml><?xml version="1.0" encoding="utf-8"?>
+<p:sld xmlns:a="http://schemas.openxmlformats.org/drawingml/2006/main" xmlns:r="http://schemas.openxmlformats.org/officeDocument/2006/relationships" xmlns:p="http://schemas.openxmlformats.org/presentationml/2006/main">
+  <p:cSld name="Slide 41">
+    <p:spTree>
+      <p:nvGrpSpPr>
+        <p:cNvPr id="1" name=""/>
+        <p:cNvGrpSpPr/>
+        <p:nvPr/>
+      </p:nvGrpSpPr>
+      <p:grpSpPr>
+        <a:xfrm>
+          <a:off x="0" y="0"/>
+          <a:ext cx="0" cy="0"/>
+          <a:chOff x="0" y="0"/>
+          <a:chExt cx="0" cy="0"/>
+        </a:xfrm>
+      </p:grpSpPr>
+      <p:sp>
+        <p:nvSpPr>
+          <p:cNvPr id="2" name="Text 0"/>
+          <p:cNvSpPr/>
+          <p:nvPr/>
+        </p:nvSpPr>
+        <p:spPr>
+          <a:xfrm>
+            <a:off x="457200" y="713232"/>
+            <a:ext cx="11368735" cy="274320"/>
+          </a:xfrm>
+          <a:prstGeom prst="rect">
+            <a:avLst/>
+          </a:prstGeom>
+          <a:noFill/>
+          <a:ln/>
+        </p:spPr>
+        <p:txBody>
+          <a:bodyPr wrap="square" lIns="0" tIns="0" rIns="0" bIns="0" rtlCol="0" anchor="ctr"/>
+          <a:lstStyle/>
+          <a:p>
+            <a:pPr algn="r" indent="0" marL="0">
+              <a:buNone/>
+            </a:pPr>
+            <a:r>
+              <a:rPr lang="en-US" sz="1400" b="1" dirty="0">
+                <a:solidFill>
+                  <a:srgbClr val="1C3F6E"/>
+                </a:solidFill>
+                <a:latin typeface="Calibri" pitchFamily="34" charset="0"/>
+                <a:ea typeface="Calibri" pitchFamily="34" charset="-122"/>
+                <a:cs typeface="Calibri" pitchFamily="34" charset="-120"/>
+              </a:rPr>
+              <a:t>FORMATIVE EVALUATION</a:t>
+            </a:r>
+            <a:endParaRPr lang="en-US" sz="1400" dirty="0"/>
+          </a:p>
+        </p:txBody>
+      </p:sp>
+      <p:pic>
+        <p:nvPicPr>
+          <p:cNvPr id="3" name="Image 0" descr="/home/claude/f4/img/minesec_sheet.png">    </p:cNvPr>
+          <p:cNvPicPr>
+            <a:picLocks noChangeAspect="1"/>
+          </p:cNvPicPr>
+          <p:nvPr/>
+        </p:nvPicPr>
+        <p:blipFill>
+          <a:blip r:embed="rId1"/>
+          <a:stretch>
+            <a:fillRect/>
+          </a:stretch>
+        </p:blipFill>
+        <p:spPr>
+          <a:xfrm>
+            <a:off x="0" y="658368"/>
+            <a:ext cx="5120640" cy="5833872"/>
+          </a:xfrm>
+          <a:prstGeom prst="rect">
+            <a:avLst/>
+          </a:prstGeom>
+        </p:spPr>
+      </p:pic>
+      <p:sp>
+        <p:nvSpPr>
+          <p:cNvPr id="4" name="Text 1"/>
+          <p:cNvSpPr/>
+          <p:nvPr/>
+        </p:nvSpPr>
+        <p:spPr>
+          <a:xfrm>
+            <a:off x="5349240" y="1005840"/>
+            <a:ext cx="6522415" cy="731520"/>
+          </a:xfrm>
+          <a:prstGeom prst="rect">
+            <a:avLst/>
+          </a:prstGeom>
+          <a:noFill/>
+          <a:ln/>
+        </p:spPr>
+        <p:txBody>
+          <a:bodyPr wrap="square" lIns="0" tIns="0" rIns="0" bIns="0" rtlCol="0" anchor="ctr">
+            <a:normAutofit/>
+          </a:bodyPr>
+          <a:lstStyle/>
+          <a:p>
+            <a:pPr algn="ctr" indent="0" marL="0">
+              <a:buNone/>
+            </a:pPr>
+            <a:r>
+              <a:rPr lang="en-US" sz="3600" b="1" dirty="0">
+                <a:solidFill>
+                  <a:srgbClr val="990011"/>
+                </a:solidFill>
+                <a:latin typeface="Times New Roman" pitchFamily="34" charset="0"/>
+                <a:ea typeface="Times New Roman" pitchFamily="34" charset="-122"/>
+                <a:cs typeface="Times New Roman" pitchFamily="34" charset="-120"/>
+              </a:rPr>
+              <a:t>Expected Answer</a:t>
+            </a:r>
+            <a:endParaRPr lang="en-US" sz="3600" dirty="0"/>
+          </a:p>
+        </p:txBody>
+      </p:sp>
+      <p:sp>
+        <p:nvSpPr>
+          <p:cNvPr id="5" name="Text 2"/>
+          <p:cNvSpPr/>
+          <p:nvPr/>
+        </p:nvSpPr>
+        <p:spPr>
+          <a:xfrm>
+            <a:off x="5349240" y="1783080"/>
+            <a:ext cx="6522415" cy="4663440"/>
+          </a:xfrm>
+          <a:prstGeom prst="rect">
+            <a:avLst/>
+          </a:prstGeom>
+          <a:noFill/>
+          <a:ln/>
+        </p:spPr>
+        <p:txBody>
+          <a:bodyPr wrap="square" lIns="0" tIns="0" rIns="0" bIns="0" rtlCol="0" anchor="t"/>
+          <a:lstStyle/>
+          <a:p>
+            <a:pPr algn="l" indent="0" marL="0">
+              <a:spcAft>
+                <a:spcPts val="800"/>
+              </a:spcAft>
+              <a:buNone/>
+            </a:pPr>
+            <a:r>
+              <a:rPr lang="en-US" sz="4000" dirty="0">
+                <a:solidFill>
+                  <a:srgbClr val="111111"/>
+                </a:solidFill>
+                <a:latin typeface="Times New Roman" pitchFamily="34" charset="0"/>
+                <a:ea typeface="Times New Roman" pitchFamily="34" charset="-122"/>
+                <a:cs typeface="Times New Roman" pitchFamily="34" charset="-120"/>
+              </a:rPr>
+              <a:t>The Nile Delta (or the Niger Delta).</a:t>
+            </a:r>
+            <a:endParaRPr lang="en-US" sz="4000" dirty="0"/>
+          </a:p>
+        </p:txBody>
+      </p:sp>
+      <p:sp>
+        <p:nvSpPr>
+          <p:cNvPr id="25" name="Slide Number Placeholder 0"/>
+          <p:cNvSpPr>
+            <a:spLocks noGrp="1"/>
+          </p:cNvSpPr>
+          <p:nvPr>
+            <p:ph type="sldNum" sz="quarter" idx="4294967295"/>
+          </p:nvPr>
+        </p:nvSpPr>
+        <p:spPr>
+          <a:xfrm>
+            <a:off x="27432" y="91440"/>
+            <a:ext cx="585216" cy="475488"/>
+          </a:xfrm>
+          <a:prstGeom prst="rect">
+            <a:avLst/>
+          </a:prstGeom>
+          <a:extLst>
+            <a:ext uri="{C572A759-6A51-4108-AA02-DFA0A04FC94B}">
+              <ma14:wrappingTextBoxFlag xmlns:ma14="http://schemas.microsoft.com/office/mac/drawingml/2011/main" val="0"/>
+            </a:ext>
+          </a:extLst>
+        </p:spPr>
+        <p:txBody>
+          <a:bodyPr/>
+          <a:lstStyle>
+            <a:lvl1pPr>
+              <a:defRPr sz="2000">
+                <a:solidFill>
+                  <a:srgbClr val="FFFFFF"/>
+                </a:solidFill>
+                <a:latin typeface="Calibri"/>
+                <a:ea typeface="Calibri"/>
+                <a:cs typeface="Calibri"/>
+              </a:defRPr>
+            </a:lvl1pPr>
+          </a:lstStyle>
+          <a:p>
+            <a:pPr algn="ctr"/>
+            <a:fld id="{F7021451-1387-4CA6-816F-3879F97B5CBC}" type="slidenum">
+              <a:rPr b="1" lang="en-US"/>
+              <a:t>41</a:t>
+            </a:fld>
+            <a:endParaRPr lang="en-US"/>
+          </a:p>
+        </p:txBody>
+      </p:sp>
+    </p:spTree>
+  </p:cSld>
+  <p:clrMapOvr>
+    <a:masterClrMapping/>
+  </p:clrMapOvr>
+</p:sld>
+</file>
+
+<file path=ppt/slides/slide42.xml><?xml version="1.0" encoding="utf-8"?>
+<p:sld xmlns:a="http://schemas.openxmlformats.org/drawingml/2006/main" xmlns:r="http://schemas.openxmlformats.org/officeDocument/2006/relationships" xmlns:p="http://schemas.openxmlformats.org/presentationml/2006/main">
+  <p:cSld name="Slide 42">
+    <p:spTree>
+      <p:nvGrpSpPr>
+        <p:cNvPr id="1" name=""/>
+        <p:cNvGrpSpPr/>
+        <p:nvPr/>
+      </p:nvGrpSpPr>
+      <p:grpSpPr>
+        <a:xfrm>
+          <a:off x="0" y="0"/>
+          <a:ext cx="0" cy="0"/>
+          <a:chOff x="0" y="0"/>
+          <a:chExt cx="0" cy="0"/>
+        </a:xfrm>
+      </p:grpSpPr>
+      <p:sp>
+        <p:nvSpPr>
+          <p:cNvPr id="2" name="Text 0"/>
+          <p:cNvSpPr/>
+          <p:nvPr/>
+        </p:nvSpPr>
+        <p:spPr>
+          <a:xfrm>
+            <a:off x="457200" y="713232"/>
+            <a:ext cx="11368735" cy="274320"/>
+          </a:xfrm>
+          <a:prstGeom prst="rect">
+            <a:avLst/>
+          </a:prstGeom>
+          <a:noFill/>
+          <a:ln/>
+        </p:spPr>
+        <p:txBody>
+          <a:bodyPr wrap="square" lIns="0" tIns="0" rIns="0" bIns="0" rtlCol="0" anchor="ctr"/>
+          <a:lstStyle/>
+          <a:p>
+            <a:pPr algn="r" indent="0" marL="0">
+              <a:buNone/>
+            </a:pPr>
+            <a:r>
+              <a:rPr lang="en-US" sz="1400" b="1" dirty="0">
+                <a:solidFill>
+                  <a:srgbClr val="1C3F6E"/>
+                </a:solidFill>
+                <a:latin typeface="Calibri" pitchFamily="34" charset="0"/>
+                <a:ea typeface="Calibri" pitchFamily="34" charset="-122"/>
+                <a:cs typeface="Calibri" pitchFamily="34" charset="-120"/>
+              </a:rPr>
+              <a:t>REMEDIATION</a:t>
+            </a:r>
+            <a:endParaRPr lang="en-US" sz="1400" dirty="0"/>
+          </a:p>
+        </p:txBody>
+      </p:sp>
+      <p:pic>
+        <p:nvPicPr>
+          <p:cNvPr id="3" name="Image 0" descr="/home/claude/f4/img/minesec_sheet.png">    </p:cNvPr>
+          <p:cNvPicPr>
+            <a:picLocks noChangeAspect="1"/>
+          </p:cNvPicPr>
+          <p:nvPr/>
+        </p:nvPicPr>
+        <p:blipFill>
+          <a:blip r:embed="rId1"/>
+          <a:stretch>
+            <a:fillRect/>
+          </a:stretch>
+        </p:blipFill>
+        <p:spPr>
+          <a:xfrm>
+            <a:off x="0" y="658368"/>
+            <a:ext cx="1463040" cy="5833872"/>
+          </a:xfrm>
+          <a:prstGeom prst="rect">
+            <a:avLst/>
+          </a:prstGeom>
+        </p:spPr>
+      </p:pic>
+      <p:sp>
+        <p:nvSpPr>
+          <p:cNvPr id="4" name="Text 1"/>
+          <p:cNvSpPr/>
+          <p:nvPr/>
+        </p:nvSpPr>
+        <p:spPr>
+          <a:xfrm>
+            <a:off x="1691640" y="1005840"/>
+            <a:ext cx="10180015" cy="731520"/>
+          </a:xfrm>
+          <a:prstGeom prst="rect">
+            <a:avLst/>
+          </a:prstGeom>
+          <a:noFill/>
+          <a:ln/>
+        </p:spPr>
+        <p:txBody>
+          <a:bodyPr wrap="square" lIns="0" tIns="0" rIns="0" bIns="0" rtlCol="0" anchor="ctr">
+            <a:normAutofit/>
+          </a:bodyPr>
+          <a:lstStyle/>
+          <a:p>
+            <a:pPr algn="ctr" indent="0" marL="0">
+              <a:buNone/>
+            </a:pPr>
+            <a:r>
+              <a:rPr lang="en-US" sz="3600" b="1" dirty="0">
+                <a:solidFill>
+                  <a:srgbClr val="990011"/>
+                </a:solidFill>
+                <a:latin typeface="Times New Roman" pitchFamily="34" charset="0"/>
+                <a:ea typeface="Times New Roman" pitchFamily="34" charset="-122"/>
+                <a:cs typeface="Times New Roman" pitchFamily="34" charset="-120"/>
+              </a:rPr>
+              <a:t>Remediation</a:t>
+            </a:r>
+            <a:endParaRPr lang="en-US" sz="3600" dirty="0"/>
+          </a:p>
+        </p:txBody>
+      </p:sp>
+      <p:sp>
+        <p:nvSpPr>
+          <p:cNvPr id="5" name="Text 2"/>
+          <p:cNvSpPr/>
+          <p:nvPr/>
+        </p:nvSpPr>
+        <p:spPr>
+          <a:xfrm>
+            <a:off x="1691640" y="1783080"/>
+            <a:ext cx="10180015" cy="4663440"/>
+          </a:xfrm>
+          <a:prstGeom prst="rect">
+            <a:avLst/>
+          </a:prstGeom>
+          <a:noFill/>
+          <a:ln/>
+        </p:spPr>
+        <p:txBody>
+          <a:bodyPr wrap="square" lIns="0" tIns="0" rIns="0" bIns="0" rtlCol="0" anchor="t"/>
+          <a:lstStyle/>
+          <a:p>
+            <a:pPr algn="l" indent="0" marL="0">
+              <a:spcAft>
+                <a:spcPts val="800"/>
+              </a:spcAft>
+              <a:buNone/>
+            </a:pPr>
+            <a:r>
+              <a:rPr lang="en-US" sz="4000" b="1" dirty="0">
+                <a:solidFill>
+                  <a:srgbClr val="111111"/>
+                </a:solidFill>
+                <a:latin typeface="Times New Roman" pitchFamily="34" charset="0"/>
+                <a:ea typeface="Times New Roman" pitchFamily="34" charset="-122"/>
+                <a:cs typeface="Times New Roman" pitchFamily="34" charset="-120"/>
+              </a:rPr>
+              <a:t>Fill in the blanks:</a:t>
+            </a:r>
+            <a:endParaRPr lang="en-US" sz="4000" dirty="0"/>
+          </a:p>
+          <a:p>
+            <a:pPr algn="l" marL="342900" indent="-342900">
+              <a:spcAft>
+                <a:spcPts val="800"/>
+              </a:spcAft>
+              <a:buSzPct val="100000"/>
+              <a:buFont typeface="+mj-lt"/>
+              <a:buAutoNum type="arabicPeriod" startAt="1"/>
+            </a:pPr>
+            <a:r>
+              <a:rPr lang="en-US" sz="4000" dirty="0">
+                <a:solidFill>
+                  <a:srgbClr val="111111"/>
+                </a:solidFill>
+                <a:latin typeface="Times New Roman" pitchFamily="34" charset="0"/>
+                <a:ea typeface="Times New Roman" pitchFamily="34" charset="-122"/>
+                <a:cs typeface="Times New Roman" pitchFamily="34" charset="-120"/>
+              </a:rPr>
+              <a:t>Flat land covered by floods is a ______.</a:t>
+            </a:r>
+            <a:endParaRPr lang="en-US" sz="4000" dirty="0"/>
+          </a:p>
+          <a:p>
+            <a:pPr algn="l" marL="342900" indent="-342900">
+              <a:spcAft>
+                <a:spcPts val="800"/>
+              </a:spcAft>
+              <a:buSzPct val="100000"/>
+              <a:buFont typeface="+mj-lt"/>
+              <a:buAutoNum type="arabicPeriod" startAt="1"/>
+            </a:pPr>
+            <a:r>
+              <a:rPr lang="en-US" sz="4000" dirty="0">
+                <a:solidFill>
+                  <a:srgbClr val="111111"/>
+                </a:solidFill>
+                <a:latin typeface="Times New Roman" pitchFamily="34" charset="0"/>
+                <a:ea typeface="Times New Roman" pitchFamily="34" charset="-122"/>
+                <a:cs typeface="Times New Roman" pitchFamily="34" charset="-120"/>
+              </a:rPr>
+              <a:t>An old meander cut off is an ______ lake.</a:t>
+            </a:r>
+            <a:endParaRPr lang="en-US" sz="4000" dirty="0"/>
+          </a:p>
+          <a:p>
+            <a:pPr algn="l" marL="342900" indent="-342900">
+              <a:spcAft>
+                <a:spcPts val="800"/>
+              </a:spcAft>
+              <a:buSzPct val="100000"/>
+              <a:buFont typeface="+mj-lt"/>
+              <a:buAutoNum type="arabicPeriod" startAt="1"/>
+            </a:pPr>
+            <a:r>
+              <a:rPr lang="en-US" sz="4000" dirty="0">
+                <a:solidFill>
+                  <a:srgbClr val="111111"/>
+                </a:solidFill>
+                <a:latin typeface="Times New Roman" pitchFamily="34" charset="0"/>
+                <a:ea typeface="Times New Roman" pitchFamily="34" charset="-122"/>
+                <a:cs typeface="Times New Roman" pitchFamily="34" charset="-120"/>
+              </a:rPr>
+              <a:t>Land made by a river at its mouth is a ______.</a:t>
+            </a:r>
+            <a:endParaRPr lang="en-US" sz="4000" dirty="0"/>
+          </a:p>
+        </p:txBody>
+      </p:sp>
+      <p:sp>
+        <p:nvSpPr>
+          <p:cNvPr id="25" name="Slide Number Placeholder 0"/>
+          <p:cNvSpPr>
+            <a:spLocks noGrp="1"/>
+          </p:cNvSpPr>
+          <p:nvPr>
+            <p:ph type="sldNum" sz="quarter" idx="4294967295"/>
+          </p:nvPr>
+        </p:nvSpPr>
+        <p:spPr>
+          <a:xfrm>
+            <a:off x="27432" y="91440"/>
+            <a:ext cx="585216" cy="475488"/>
+          </a:xfrm>
+          <a:prstGeom prst="rect">
+            <a:avLst/>
+          </a:prstGeom>
+          <a:extLst>
+            <a:ext uri="{C572A759-6A51-4108-AA02-DFA0A04FC94B}">
+              <ma14:wrappingTextBoxFlag xmlns:ma14="http://schemas.microsoft.com/office/mac/drawingml/2011/main" val="0"/>
+            </a:ext>
+          </a:extLst>
+        </p:spPr>
+        <p:txBody>
+          <a:bodyPr/>
+          <a:lstStyle>
+            <a:lvl1pPr>
+              <a:defRPr sz="2000">
+                <a:solidFill>
+                  <a:srgbClr val="FFFFFF"/>
+                </a:solidFill>
+                <a:latin typeface="Calibri"/>
+                <a:ea typeface="Calibri"/>
+                <a:cs typeface="Calibri"/>
+              </a:defRPr>
+            </a:lvl1pPr>
+          </a:lstStyle>
+          <a:p>
+            <a:pPr algn="ctr"/>
+            <a:fld id="{F7021451-1387-4CA6-816F-3879F97B5CBC}" type="slidenum">
+              <a:rPr b="1" lang="en-US"/>
+              <a:t>42</a:t>
+            </a:fld>
+            <a:endParaRPr lang="en-US"/>
+          </a:p>
+        </p:txBody>
+      </p:sp>
+    </p:spTree>
+  </p:cSld>
+  <p:clrMapOvr>
+    <a:masterClrMapping/>
+  </p:clrMapOvr>
+</p:sld>
+</file>
+
+<file path=ppt/slides/slide43.xml><?xml version="1.0" encoding="utf-8"?>
+<p:sld xmlns:a="http://schemas.openxmlformats.org/drawingml/2006/main" xmlns:r="http://schemas.openxmlformats.org/officeDocument/2006/relationships" xmlns:p="http://schemas.openxmlformats.org/presentationml/2006/main">
+  <p:cSld name="Slide 43">
+    <p:spTree>
+      <p:nvGrpSpPr>
+        <p:cNvPr id="1" name=""/>
+        <p:cNvGrpSpPr/>
+        <p:nvPr/>
+      </p:nvGrpSpPr>
+      <p:grpSpPr>
+        <a:xfrm>
+          <a:off x="0" y="0"/>
+          <a:ext cx="0" cy="0"/>
+          <a:chOff x="0" y="0"/>
+          <a:chExt cx="0" cy="0"/>
+        </a:xfrm>
+      </p:grpSpPr>
+      <p:sp>
+        <p:nvSpPr>
+          <p:cNvPr id="2" name="Text 0"/>
+          <p:cNvSpPr/>
+          <p:nvPr/>
+        </p:nvSpPr>
+        <p:spPr>
+          <a:xfrm>
+            <a:off x="457200" y="713232"/>
+            <a:ext cx="11368735" cy="274320"/>
+          </a:xfrm>
+          <a:prstGeom prst="rect">
+            <a:avLst/>
+          </a:prstGeom>
+          <a:noFill/>
+          <a:ln/>
+        </p:spPr>
+        <p:txBody>
+          <a:bodyPr wrap="square" lIns="0" tIns="0" rIns="0" bIns="0" rtlCol="0" anchor="ctr"/>
+          <a:lstStyle/>
+          <a:p>
+            <a:pPr algn="r" indent="0" marL="0">
+              <a:buNone/>
+            </a:pPr>
+            <a:r>
+              <a:rPr lang="en-US" sz="1400" b="1" dirty="0">
+                <a:solidFill>
+                  <a:srgbClr val="1C3F6E"/>
+                </a:solidFill>
+                <a:latin typeface="Calibri" pitchFamily="34" charset="0"/>
+                <a:ea typeface="Calibri" pitchFamily="34" charset="-122"/>
+                <a:cs typeface="Calibri" pitchFamily="34" charset="-120"/>
+              </a:rPr>
+              <a:t>HOMEWORK</a:t>
+            </a:r>
+            <a:endParaRPr lang="en-US" sz="1400" dirty="0"/>
+          </a:p>
+        </p:txBody>
+      </p:sp>
+      <p:pic>
+        <p:nvPicPr>
+          <p:cNvPr id="3" name="Image 0" descr="/home/claude/f4/img/minesec_sheet.png">    </p:cNvPr>
+          <p:cNvPicPr>
+            <a:picLocks noChangeAspect="1"/>
+          </p:cNvPicPr>
+          <p:nvPr/>
+        </p:nvPicPr>
+        <p:blipFill>
+          <a:blip r:embed="rId1"/>
+          <a:stretch>
+            <a:fillRect/>
+          </a:stretch>
+        </p:blipFill>
+        <p:spPr>
+          <a:xfrm>
+            <a:off x="0" y="658368"/>
+            <a:ext cx="5120640" cy="5833872"/>
+          </a:xfrm>
+          <a:prstGeom prst="rect">
+            <a:avLst/>
+          </a:prstGeom>
+        </p:spPr>
+      </p:pic>
+      <p:sp>
+        <p:nvSpPr>
+          <p:cNvPr id="4" name="Text 1"/>
+          <p:cNvSpPr/>
+          <p:nvPr/>
+        </p:nvSpPr>
+        <p:spPr>
+          <a:xfrm>
+            <a:off x="5349240" y="1005840"/>
+            <a:ext cx="6522415" cy="731520"/>
+          </a:xfrm>
+          <a:prstGeom prst="rect">
+            <a:avLst/>
+          </a:prstGeom>
+          <a:noFill/>
+          <a:ln/>
+        </p:spPr>
+        <p:txBody>
+          <a:bodyPr wrap="square" lIns="0" tIns="0" rIns="0" bIns="0" rtlCol="0" anchor="ctr">
+            <a:normAutofit/>
+          </a:bodyPr>
+          <a:lstStyle/>
+          <a:p>
+            <a:pPr algn="ctr" indent="0" marL="0">
+              <a:buNone/>
+            </a:pPr>
+            <a:r>
+              <a:rPr lang="en-US" sz="3600" b="1" dirty="0">
+                <a:solidFill>
+                  <a:srgbClr val="990011"/>
+                </a:solidFill>
+                <a:latin typeface="Times New Roman" pitchFamily="34" charset="0"/>
+                <a:ea typeface="Times New Roman" pitchFamily="34" charset="-122"/>
+                <a:cs typeface="Times New Roman" pitchFamily="34" charset="-120"/>
+              </a:rPr>
+              <a:t>Homework</a:t>
+            </a:r>
+            <a:endParaRPr lang="en-US" sz="3600" dirty="0"/>
+          </a:p>
+        </p:txBody>
+      </p:sp>
+      <p:sp>
+        <p:nvSpPr>
+          <p:cNvPr id="5" name="Text 2"/>
+          <p:cNvSpPr/>
+          <p:nvPr/>
+        </p:nvSpPr>
+        <p:spPr>
+          <a:xfrm>
+            <a:off x="5349240" y="1783080"/>
+            <a:ext cx="6522415" cy="4663440"/>
+          </a:xfrm>
+          <a:prstGeom prst="rect">
+            <a:avLst/>
+          </a:prstGeom>
+          <a:noFill/>
+          <a:ln/>
+        </p:spPr>
+        <p:txBody>
+          <a:bodyPr wrap="square" lIns="0" tIns="0" rIns="0" bIns="0" rtlCol="0" anchor="t"/>
+          <a:lstStyle/>
+          <a:p>
+            <a:pPr algn="l" indent="0" marL="0">
+              <a:spcAft>
+                <a:spcPts val="800"/>
+              </a:spcAft>
+              <a:buNone/>
+            </a:pPr>
+            <a:r>
+              <a:rPr lang="en-US" sz="4000" dirty="0">
+                <a:solidFill>
+                  <a:srgbClr val="111111"/>
+                </a:solidFill>
+                <a:latin typeface="Times New Roman" pitchFamily="34" charset="0"/>
+                <a:ea typeface="Times New Roman" pitchFamily="34" charset="-122"/>
+                <a:cs typeface="Times New Roman" pitchFamily="34" charset="-120"/>
+              </a:rPr>
+              <a:t>Ask two people who live or farm near the Benue: what are the advantages of the river, and what problems do the floods cause? Write their answers.</a:t>
+            </a:r>
+            <a:endParaRPr lang="en-US" sz="4000" dirty="0"/>
+          </a:p>
+        </p:txBody>
+      </p:sp>
+      <p:sp>
+        <p:nvSpPr>
+          <p:cNvPr id="25" name="Slide Number Placeholder 0"/>
+          <p:cNvSpPr>
+            <a:spLocks noGrp="1"/>
+          </p:cNvSpPr>
+          <p:nvPr>
+            <p:ph type="sldNum" sz="quarter" idx="4294967295"/>
+          </p:nvPr>
+        </p:nvSpPr>
+        <p:spPr>
+          <a:xfrm>
+            <a:off x="27432" y="91440"/>
+            <a:ext cx="585216" cy="475488"/>
+          </a:xfrm>
+          <a:prstGeom prst="rect">
+            <a:avLst/>
+          </a:prstGeom>
+          <a:extLst>
+            <a:ext uri="{C572A759-6A51-4108-AA02-DFA0A04FC94B}">
+              <ma14:wrappingTextBoxFlag xmlns:ma14="http://schemas.microsoft.com/office/mac/drawingml/2011/main" val="0"/>
+            </a:ext>
+          </a:extLst>
+        </p:spPr>
+        <p:txBody>
+          <a:bodyPr/>
+          <a:lstStyle>
+            <a:lvl1pPr>
+              <a:defRPr sz="2000">
+                <a:solidFill>
+                  <a:srgbClr val="FFFFFF"/>
+                </a:solidFill>
+                <a:latin typeface="Calibri"/>
+                <a:ea typeface="Calibri"/>
+                <a:cs typeface="Calibri"/>
+              </a:defRPr>
+            </a:lvl1pPr>
+          </a:lstStyle>
+          <a:p>
+            <a:pPr algn="ctr"/>
+            <a:fld id="{F7021451-1387-4CA6-816F-3879F97B5CBC}" type="slidenum">
+              <a:rPr b="1" lang="en-US"/>
+              <a:t>43</a:t>
+            </a:fld>
+            <a:endParaRPr lang="en-US"/>
+          </a:p>
+        </p:txBody>
+      </p:sp>
+    </p:spTree>
+  </p:cSld>
+  <p:clrMapOvr>
+    <a:masterClrMapping/>
+  </p:clrMapOvr>
+</p:sld>
+</file>
+
+<file path=ppt/slides/slide44.xml><?xml version="1.0" encoding="utf-8"?>
+<p:sld xmlns:a="http://schemas.openxmlformats.org/drawingml/2006/main" xmlns:r="http://schemas.openxmlformats.org/officeDocument/2006/relationships" xmlns:p="http://schemas.openxmlformats.org/presentationml/2006/main">
+  <p:cSld name="Slide 44">
+    <p:spTree>
+      <p:nvGrpSpPr>
+        <p:cNvPr id="1" name=""/>
+        <p:cNvGrpSpPr/>
+        <p:nvPr/>
+      </p:nvGrpSpPr>
+      <p:grpSpPr>
+        <a:xfrm>
+          <a:off x="0" y="0"/>
+          <a:ext cx="0" cy="0"/>
+          <a:chOff x="0" y="0"/>
+          <a:chExt cx="0" cy="0"/>
+        </a:xfrm>
+      </p:grpSpPr>
+      <p:sp>
+        <p:nvSpPr>
+          <p:cNvPr id="2" name="Text 0"/>
+          <p:cNvSpPr/>
+          <p:nvPr/>
+        </p:nvSpPr>
+        <p:spPr>
+          <a:xfrm>
+            <a:off x="457200" y="713232"/>
+            <a:ext cx="11368735" cy="274320"/>
+          </a:xfrm>
+          <a:prstGeom prst="rect">
+            <a:avLst/>
+          </a:prstGeom>
+          <a:noFill/>
+          <a:ln/>
+        </p:spPr>
+        <p:txBody>
+          <a:bodyPr wrap="square" lIns="0" tIns="0" rIns="0" bIns="0" rtlCol="0" anchor="ctr"/>
+          <a:lstStyle/>
+          <a:p>
+            <a:pPr algn="r" indent="0" marL="0">
+              <a:buNone/>
+            </a:pPr>
+            <a:r>
+              <a:rPr lang="en-US" sz="1400" b="1" dirty="0">
+                <a:solidFill>
+                  <a:srgbClr val="1C3F6E"/>
+                </a:solidFill>
+                <a:latin typeface="Calibri" pitchFamily="34" charset="0"/>
+                <a:ea typeface="Calibri" pitchFamily="34" charset="-122"/>
+                <a:cs typeface="Calibri" pitchFamily="34" charset="-120"/>
+              </a:rPr>
+              <a:t>NEXT LESSON</a:t>
+            </a:r>
+            <a:endParaRPr lang="en-US" sz="1400" dirty="0"/>
+          </a:p>
+        </p:txBody>
+      </p:sp>
+      <p:pic>
+        <p:nvPicPr>
+          <p:cNvPr id="3" name="Image 0" descr="/home/claude/f4/img/minesec_sheet.png">    </p:cNvPr>
+          <p:cNvPicPr>
+            <a:picLocks noChangeAspect="1"/>
+          </p:cNvPicPr>
+          <p:nvPr/>
+        </p:nvPicPr>
+        <p:blipFill>
+          <a:blip r:embed="rId1"/>
+          <a:stretch>
+            <a:fillRect/>
+          </a:stretch>
+        </p:blipFill>
+        <p:spPr>
+          <a:xfrm>
+            <a:off x="0" y="658368"/>
+            <a:ext cx="5120640" cy="5833872"/>
+          </a:xfrm>
+          <a:prstGeom prst="rect">
+            <a:avLst/>
+          </a:prstGeom>
+        </p:spPr>
+      </p:pic>
+      <p:sp>
+        <p:nvSpPr>
+          <p:cNvPr id="4" name="Text 1"/>
+          <p:cNvSpPr/>
+          <p:nvPr/>
+        </p:nvSpPr>
+        <p:spPr>
+          <a:xfrm>
+            <a:off x="5349240" y="1005840"/>
+            <a:ext cx="6522415" cy="731520"/>
+          </a:xfrm>
+          <a:prstGeom prst="rect">
+            <a:avLst/>
+          </a:prstGeom>
+          <a:noFill/>
+          <a:ln/>
+        </p:spPr>
+        <p:txBody>
+          <a:bodyPr wrap="square" lIns="0" tIns="0" rIns="0" bIns="0" rtlCol="0" anchor="ctr">
+            <a:normAutofit/>
+          </a:bodyPr>
+          <a:lstStyle/>
+          <a:p>
+            <a:pPr algn="ctr" indent="0" marL="0">
+              <a:buNone/>
+            </a:pPr>
+            <a:r>
+              <a:rPr lang="en-US" sz="3600" b="1" dirty="0">
+                <a:solidFill>
+                  <a:srgbClr val="990011"/>
+                </a:solidFill>
+                <a:latin typeface="Times New Roman" pitchFamily="34" charset="0"/>
+                <a:ea typeface="Times New Roman" pitchFamily="34" charset="-122"/>
+                <a:cs typeface="Times New Roman" pitchFamily="34" charset="-120"/>
+              </a:rPr>
+              <a:t>Next Lesson</a:t>
+            </a:r>
+            <a:endParaRPr lang="en-US" sz="3600" dirty="0"/>
+          </a:p>
+        </p:txBody>
+      </p:sp>
+      <p:sp>
+        <p:nvSpPr>
+          <p:cNvPr id="5" name="Text 2"/>
+          <p:cNvSpPr/>
+          <p:nvPr/>
+        </p:nvSpPr>
+        <p:spPr>
+          <a:xfrm>
+            <a:off x="5349240" y="1783080"/>
+            <a:ext cx="6522415" cy="4663440"/>
+          </a:xfrm>
+          <a:prstGeom prst="rect">
+            <a:avLst/>
+          </a:prstGeom>
+          <a:noFill/>
+          <a:ln/>
+        </p:spPr>
+        <p:txBody>
+          <a:bodyPr wrap="square" lIns="0" tIns="0" rIns="0" bIns="0" rtlCol="0" anchor="ctr"/>
+          <a:lstStyle/>
+          <a:p>
+            <a:pPr algn="ctr" indent="0" marL="0">
+              <a:spcAft>
+                <a:spcPts val="800"/>
+              </a:spcAft>
+              <a:buNone/>
+            </a:pPr>
+            <a:r>
+              <a:rPr lang="en-US" sz="4000" b="1" dirty="0">
+                <a:solidFill>
+                  <a:srgbClr val="111111"/>
+                </a:solidFill>
+                <a:latin typeface="Times New Roman" pitchFamily="34" charset="0"/>
+                <a:ea typeface="Times New Roman" pitchFamily="34" charset="-122"/>
+                <a:cs typeface="Times New Roman" pitchFamily="34" charset="-120"/>
+              </a:rPr>
+              <a:t>Our next lesson will be on:</a:t>
+            </a:r>
+            <a:endParaRPr lang="en-US" sz="4000" dirty="0"/>
+          </a:p>
+          <a:p>
+            <a:pPr algn="ctr" indent="0" marL="0">
+              <a:spcAft>
+                <a:spcPts val="800"/>
+              </a:spcAft>
+              <a:buNone/>
+            </a:pPr>
+            <a:r>
+              <a:rPr lang="en-US" sz="4000" b="1" dirty="0">
+                <a:solidFill>
+                  <a:srgbClr val="990011"/>
+                </a:solidFill>
+                <a:latin typeface="Times New Roman" pitchFamily="34" charset="0"/>
+                <a:ea typeface="Times New Roman" pitchFamily="34" charset="-122"/>
+                <a:cs typeface="Times New Roman" pitchFamily="34" charset="-120"/>
+              </a:rPr>
+              <a:t>Lesson 22: Man and Floodplain Interactions</a:t>
+            </a:r>
+            <a:endParaRPr lang="en-US" sz="4000" dirty="0"/>
+          </a:p>
+        </p:txBody>
+      </p:sp>
+      <p:sp>
+        <p:nvSpPr>
+          <p:cNvPr id="25" name="Slide Number Placeholder 0"/>
+          <p:cNvSpPr>
+            <a:spLocks noGrp="1"/>
+          </p:cNvSpPr>
+          <p:nvPr>
+            <p:ph type="sldNum" sz="quarter" idx="4294967295"/>
+          </p:nvPr>
+        </p:nvSpPr>
+        <p:spPr>
+          <a:xfrm>
+            <a:off x="27432" y="91440"/>
+            <a:ext cx="585216" cy="475488"/>
+          </a:xfrm>
+          <a:prstGeom prst="rect">
+            <a:avLst/>
+          </a:prstGeom>
+          <a:extLst>
+            <a:ext uri="{C572A759-6A51-4108-AA02-DFA0A04FC94B}">
+              <ma14:wrappingTextBoxFlag xmlns:ma14="http://schemas.microsoft.com/office/mac/drawingml/2011/main" val="0"/>
+            </a:ext>
+          </a:extLst>
+        </p:spPr>
+        <p:txBody>
+          <a:bodyPr/>
+          <a:lstStyle>
+            <a:lvl1pPr>
+              <a:defRPr sz="2000">
+                <a:solidFill>
+                  <a:srgbClr val="FFFFFF"/>
+                </a:solidFill>
+                <a:latin typeface="Calibri"/>
+                <a:ea typeface="Calibri"/>
+                <a:cs typeface="Calibri"/>
+              </a:defRPr>
+            </a:lvl1pPr>
+          </a:lstStyle>
+          <a:p>
+            <a:pPr algn="ctr"/>
+            <a:fld id="{F7021451-1387-4CA6-816F-3879F97B5CBC}" type="slidenum">
+              <a:rPr b="1" lang="en-US"/>
+              <a:t>44</a:t>
+            </a:fld>
+            <a:endParaRPr lang="en-US"/>
+          </a:p>
+        </p:txBody>
+      </p:sp>
+    </p:spTree>
+  </p:cSld>
+  <p:clrMapOvr>
+    <a:masterClrMapping/>
+  </p:clrMapOvr>
+</p:sld>
+</file>
+
+<file path=ppt/slides/slide45.xml><?xml version="1.0" encoding="utf-8"?>
+<p:sld xmlns:a="http://schemas.openxmlformats.org/drawingml/2006/main" xmlns:r="http://schemas.openxmlformats.org/officeDocument/2006/relationships" xmlns:p="http://schemas.openxmlformats.org/presentationml/2006/main">
+  <p:cSld name="Slide 45">
+    <p:spTree>
+      <p:nvGrpSpPr>
+        <p:cNvPr id="1" name=""/>
+        <p:cNvGrpSpPr/>
+        <p:nvPr/>
+      </p:nvGrpSpPr>
+      <p:grpSpPr>
+        <a:xfrm>
+          <a:off x="0" y="0"/>
+          <a:ext cx="0" cy="0"/>
+          <a:chOff x="0" y="0"/>
+          <a:chExt cx="0" cy="0"/>
+        </a:xfrm>
+      </p:grpSpPr>
+      <p:sp>
+        <p:nvSpPr>
+          <p:cNvPr id="2" name="Text 0"/>
+          <p:cNvSpPr/>
+          <p:nvPr/>
+        </p:nvSpPr>
+        <p:spPr>
+          <a:xfrm>
+            <a:off x="457200" y="713232"/>
+            <a:ext cx="11368735" cy="274320"/>
+          </a:xfrm>
+          <a:prstGeom prst="rect">
+            <a:avLst/>
+          </a:prstGeom>
+          <a:noFill/>
+          <a:ln/>
+        </p:spPr>
+        <p:txBody>
+          <a:bodyPr wrap="square" lIns="0" tIns="0" rIns="0" bIns="0" rtlCol="0" anchor="ctr"/>
+          <a:lstStyle/>
+          <a:p>
+            <a:pPr algn="r" indent="0" marL="0">
+              <a:buNone/>
+            </a:pPr>
+            <a:r>
+              <a:rPr lang="en-US" sz="1400" b="1" dirty="0">
+                <a:solidFill>
+                  <a:srgbClr val="1C3F6E"/>
+                </a:solidFill>
+                <a:latin typeface="Calibri" pitchFamily="34" charset="0"/>
+                <a:ea typeface="Calibri" pitchFamily="34" charset="-122"/>
+                <a:cs typeface="Calibri" pitchFamily="34" charset="-120"/>
+              </a:rPr>
               <a:t>BILINGUAL GAME</a:t>
             </a:r>
             <a:endParaRPr lang="en-US" sz="1400" dirty="0"/>
@@ -14491,7 +16277,7 @@
       </p:sp>
       <p:graphicFrame>
         <p:nvGraphicFramePr>
-          <p:cNvPr id="41" name="Table 0"/>
+          <p:cNvPr id="46" name="Table 0"/>
           <p:cNvGraphicFramePr>
             <a:graphicFrameLocks noGrp="1"/>
           </p:cNvGraphicFramePr>
@@ -15803,7 +17589,7 @@
             <a:pPr algn="ctr"/>
             <a:fld id="{F7021451-1387-4CA6-816F-3879F97B5CBC}" type="slidenum">
               <a:rPr b="1" lang="en-US"/>
-              <a:t>40</a:t>
+              <a:t>45</a:t>
             </a:fld>
             <a:endParaRPr lang="en-US"/>
           </a:p>
@@ -15817,9 +17603,9 @@
 </p:sld>
 </file>
 
-<file path=ppt/slides/slide41.xml><?xml version="1.0" encoding="utf-8"?>
+<file path=ppt/slides/slide46.xml><?xml version="1.0" encoding="utf-8"?>
 <p:sld xmlns:a="http://schemas.openxmlformats.org/drawingml/2006/main" xmlns:r="http://schemas.openxmlformats.org/officeDocument/2006/relationships" xmlns:p="http://schemas.openxmlformats.org/presentationml/2006/main">
-  <p:cSld name="Slide 41">
+  <p:cSld name="Slide 46">
     <p:spTree>
       <p:nvGrpSpPr>
         <p:cNvPr id="1" name=""/>
@@ -15914,7 +17700,7 @@
       </p:sp>
       <p:graphicFrame>
         <p:nvGraphicFramePr>
-          <p:cNvPr id="42" name="Table 0"/>
+          <p:cNvPr id="47" name="Table 0"/>
           <p:cNvGraphicFramePr>
             <a:graphicFrameLocks noGrp="1"/>
           </p:cNvGraphicFramePr>
@@ -16536,7 +18322,7 @@
             <a:pPr algn="ctr"/>
             <a:fld id="{F7021451-1387-4CA6-816F-3879F97B5CBC}" type="slidenum">
               <a:rPr b="1" lang="en-US"/>
-              <a:t>41</a:t>
+              <a:t>46</a:t>
             </a:fld>
             <a:endParaRPr lang="en-US"/>
           </a:p>
@@ -16550,9 +18336,9 @@
 </p:sld>
 </file>
 
-<file path=ppt/slides/slide42.xml><?xml version="1.0" encoding="utf-8"?>
+<file path=ppt/slides/slide47.xml><?xml version="1.0" encoding="utf-8"?>
 <p:sld xmlns:a="http://schemas.openxmlformats.org/drawingml/2006/main" xmlns:r="http://schemas.openxmlformats.org/officeDocument/2006/relationships" xmlns:p="http://schemas.openxmlformats.org/presentationml/2006/main">
-  <p:cSld name="Slide 42">
+  <p:cSld name="Slide 47">
     <p:spTree>
       <p:nvGrpSpPr>
         <p:cNvPr id="1" name=""/>
@@ -16647,7 +18433,7 @@
       </p:sp>
       <p:graphicFrame>
         <p:nvGraphicFramePr>
-          <p:cNvPr id="43" name="Table 0"/>
+          <p:cNvPr id="48" name="Table 0"/>
           <p:cNvGraphicFramePr>
             <a:graphicFrameLocks noGrp="1"/>
           </p:cNvGraphicFramePr>
@@ -16757,7 +18543,7 @@
                           <a:ea typeface="Calibri" pitchFamily="34" charset="-122"/>
                           <a:cs typeface="Calibri" pitchFamily="34" charset="-120"/>
                         </a:rPr>
-                        <a:t>Characteristics of the Lower Course; Landforms of the Lower Course.</a:t>
+                        <a:t>DEFINITIONS; Main Characteristics and Processes of the Lower Course; Landforms of the Lower Course.</a:t>
                       </a:r>
                       <a:endParaRPr lang="en-US" sz="1600" dirty="0">
                         <a:latin typeface="Calibri" charset="0"/>
@@ -17407,7 +19193,7 @@
             <a:pPr algn="ctr"/>
             <a:fld id="{F7021451-1387-4CA6-816F-3879F97B5CBC}" type="slidenum">
               <a:rPr b="1" lang="en-US"/>
-              <a:t>42</a:t>
+              <a:t>47</a:t>
             </a:fld>
             <a:endParaRPr lang="en-US"/>
           </a:p>
@@ -17421,9 +19207,9 @@
 </p:sld>
 </file>
 
-<file path=ppt/slides/slide43.xml><?xml version="1.0" encoding="utf-8"?>
+<file path=ppt/slides/slide48.xml><?xml version="1.0" encoding="utf-8"?>
 <p:sld xmlns:a="http://schemas.openxmlformats.org/drawingml/2006/main" xmlns:r="http://schemas.openxmlformats.org/officeDocument/2006/relationships" xmlns:p="http://schemas.openxmlformats.org/presentationml/2006/main">
-  <p:cSld name="Slide 43">
+  <p:cSld name="Slide 48">
     <p:spTree>
       <p:nvGrpSpPr>
         <p:cNvPr id="1" name=""/>
@@ -17621,7 +19407,7 @@
                 <a:ea typeface="Calibri" pitchFamily="34" charset="-122"/>
                 <a:cs typeface="Calibri" pitchFamily="34" charset="-120"/>
               </a:rPr>
-              <a:t>Without the projector (Activity 1): describe the flat land along the Benue.</a:t>
+              <a:t>Without the projector (Activity 1): describe the land along the Benue.</a:t>
             </a:r>
             <a:endParaRPr lang="en-US" sz="2000" dirty="0"/>
           </a:p>
@@ -17642,7 +19428,7 @@
                 <a:ea typeface="Calibri" pitchFamily="34" charset="-122"/>
                 <a:cs typeface="Calibri" pitchFamily="34" charset="-120"/>
               </a:rPr>
-              <a:t>Without the projector (Activity 2): draw the three steps on the board.</a:t>
+              <a:t>Without the projector (Activity 2): draw the three stages on the board.</a:t>
             </a:r>
             <a:endParaRPr lang="en-US" sz="2000" dirty="0"/>
           </a:p>
@@ -17663,7 +19449,7 @@
                 <a:ea typeface="Calibri" pitchFamily="34" charset="-122"/>
                 <a:cs typeface="Calibri" pitchFamily="34" charset="-120"/>
               </a:rPr>
-              <a:t>Without the projector (Activity 3): draw a triangle at the mouth of a river.</a:t>
+              <a:t>Without the projector (Activity 3): show the Niger Delta in the atlas.</a:t>
             </a:r>
             <a:endParaRPr lang="en-US" sz="2000" dirty="0"/>
           </a:p>
@@ -17711,7 +19497,7 @@
             <a:pPr algn="ctr"/>
             <a:fld id="{F7021451-1387-4CA6-816F-3879F97B5CBC}" type="slidenum">
               <a:rPr b="1" lang="en-US"/>
-              <a:t>43</a:t>
+              <a:t>48</a:t>
             </a:fld>
             <a:endParaRPr lang="en-US"/>
           </a:p>
@@ -17725,9 +19511,9 @@
 </p:sld>
 </file>
 
-<file path=ppt/slides/slide44.xml><?xml version="1.0" encoding="utf-8"?>
+<file path=ppt/slides/slide49.xml><?xml version="1.0" encoding="utf-8"?>
 <p:sld xmlns:a="http://schemas.openxmlformats.org/drawingml/2006/main" xmlns:r="http://schemas.openxmlformats.org/officeDocument/2006/relationships" xmlns:p="http://schemas.openxmlformats.org/presentationml/2006/main">
-  <p:cSld name="Slide 44">
+  <p:cSld name="Slide 49">
     <p:spTree>
       <p:nvGrpSpPr>
         <p:cNvPr id="1" name=""/>
@@ -18015,7 +19801,7 @@
             <a:pPr algn="ctr"/>
             <a:fld id="{F7021451-1387-4CA6-816F-3879F97B5CBC}" type="slidenum">
               <a:rPr b="1" lang="en-US"/>
-              <a:t>44</a:t>
+              <a:t>49</a:t>
             </a:fld>
             <a:endParaRPr lang="en-US"/>
           </a:p>

--- a/lecons/F3/25_FORM4_LESSON21_Lower_Course.pptx
+++ b/lecons/F3/25_FORM4_LESSON21_Lower_Course.pptx
@@ -10752,7 +10752,7 @@
               <a:buNone/>
             </a:pPr>
             <a:r>
-              <a:rPr lang="en-US" sz="4000" b="1" dirty="0">
+              <a:rPr lang="en-US" sz="3200" b="1" dirty="0">
                 <a:solidFill>
                   <a:srgbClr val="111111"/>
                 </a:solidFill>
@@ -10762,7 +10762,7 @@
               </a:rPr>
               <a:t>Topic: Denudation Processes, Landforms and Impacts on Man</a:t>
             </a:r>
-            <a:endParaRPr lang="en-US" sz="4000" dirty="0"/>
+            <a:endParaRPr lang="en-US" sz="3200" dirty="0"/>
           </a:p>
           <a:p>
             <a:pPr algn="l" indent="0" marL="0">
@@ -10772,7 +10772,7 @@
               <a:buNone/>
             </a:pPr>
             <a:r>
-              <a:rPr lang="en-US" sz="4000" b="1" dirty="0">
+              <a:rPr lang="en-US" sz="3200" b="1" dirty="0">
                 <a:solidFill>
                   <a:srgbClr val="111111"/>
                 </a:solidFill>
@@ -10782,7 +10782,7 @@
               </a:rPr>
               <a:t>Sub-topic: The Work of Rivers on the Landscape and Impacts on Man</a:t>
             </a:r>
-            <a:endParaRPr lang="en-US" sz="4000" dirty="0"/>
+            <a:endParaRPr lang="en-US" sz="3200" dirty="0"/>
           </a:p>
           <a:p>
             <a:pPr algn="l" indent="0" marL="0">
@@ -10792,7 +10792,7 @@
               <a:buNone/>
             </a:pPr>
             <a:r>
-              <a:rPr lang="en-US" sz="4000" b="1" dirty="0">
+              <a:rPr lang="en-US" sz="3200" b="1" dirty="0">
                 <a:solidFill>
                   <a:srgbClr val="990011"/>
                 </a:solidFill>
@@ -10802,7 +10802,7 @@
               </a:rPr>
               <a:t>Lesson 21: The Lower Course of a River</a:t>
             </a:r>
-            <a:endParaRPr lang="en-US" sz="4000" dirty="0"/>
+            <a:endParaRPr lang="en-US" sz="3200" dirty="0"/>
           </a:p>
         </p:txBody>
       </p:sp>

--- a/lecons/F3/25_FORM4_LESSON21_Lower_Course.pptx
+++ b/lecons/F3/25_FORM4_LESSON21_Lower_Course.pptx
@@ -3454,7 +3454,7 @@
           <a:p>
             <a:r>
               <a:rPr lang="en-US" dirty="0"/>
-              <a:t>Before we start the new lesson, let us correct the homework I gave you at the end of Lesson 20: The Middle Course of a River. The question was: Look at a map of the Niger Delta or the Nile Delta in your atlas. Draw its shape and name the sea it reaches. Take out your exercise books.</a:t>
+              <a:t>Before we start the new lesson, let us correct the homework I gave you at the end of Lesson 20: The Middle Course of a River. The question was: Name two landforms of the lower course of a river. Take out your exercise books.</a:t>
             </a:r>
             <a:endParaRPr lang="en-US" dirty="0"/>
           </a:p>
@@ -3806,7 +3806,7 @@
           <a:p>
             <a:r>
               <a:rPr lang="en-US" dirty="0"/>
-              <a:t>For your homework: Ask two people who live or farm near the Benue: what are the advantages of the river, and what problems do the floods cause? Write their answers. We shall correct it at the beginning of our next lesson.</a:t>
+              <a:t>For your homework: Give two uses of floodplains. We shall correct it at the beginning of our next lesson.</a:t>
             </a:r>
             <a:endParaRPr lang="en-US" dirty="0"/>
           </a:p>
@@ -4422,7 +4422,7 @@
           <a:p>
             <a:r>
               <a:rPr lang="en-US" dirty="0"/>
-              <a:t>Here is a good answer. A delta is shaped like a triangle or a fan of land with many channels. The Niger Delta reaches the Gulf of Guinea (Atlantic Ocean); the Nile Delta reaches the Mediterranean Sea. Compare it with your own answer and correct your work in red.</a:t>
+              <a:t>Here is a good answer. The floodplain and the delta (also levees and ox-bow lakes). Compare it with your own answer and correct your work in red.</a:t>
             </a:r>
             <a:endParaRPr lang="en-US" dirty="0"/>
           </a:p>
@@ -14937,7 +14937,7 @@
                 <a:ea typeface="Times New Roman" pitchFamily="34" charset="-122"/>
                 <a:cs typeface="Times New Roman" pitchFamily="34" charset="-120"/>
               </a:rPr>
-              <a:t>Look at a map of the Niger Delta or the Nile Delta in your atlas. Draw its shape and name the sea it reaches.</a:t>
+              <a:t>Name two landforms of the lower course of a river.</a:t>
             </a:r>
             <a:endParaRPr lang="en-US" sz="4000" dirty="0"/>
           </a:p>
@@ -15879,7 +15879,7 @@
                 <a:ea typeface="Times New Roman" pitchFamily="34" charset="-122"/>
                 <a:cs typeface="Times New Roman" pitchFamily="34" charset="-120"/>
               </a:rPr>
-              <a:t>Ask two people who live or farm near the Benue: what are the advantages of the river, and what problems do the floods cause? Write their answers.</a:t>
+              <a:t>Give two uses of floodplains.</a:t>
             </a:r>
             <a:endParaRPr lang="en-US" sz="4000" dirty="0"/>
           </a:p>
@@ -18819,7 +18819,7 @@
                           <a:ea typeface="Calibri" pitchFamily="34" charset="-122"/>
                           <a:cs typeface="Calibri" pitchFamily="34" charset="-120"/>
                         </a:rPr>
-                        <a:t>Ask two people who live or farm near the Benue: what are the advantages of the river, and what problems do the floods cause? Write their answers.</a:t>
+                        <a:t>Give two uses of floodplains.</a:t>
                       </a:r>
                       <a:endParaRPr lang="en-US" sz="1600" dirty="0">
                         <a:latin typeface="Calibri" charset="0"/>
@@ -19972,7 +19972,7 @@
                 <a:ea typeface="Times New Roman" pitchFamily="34" charset="-122"/>
                 <a:cs typeface="Times New Roman" pitchFamily="34" charset="-120"/>
               </a:rPr>
-              <a:t>A delta is shaped like a triangle or a fan of land with many channels. The Niger Delta reaches the Gulf of Guinea (Atlantic Ocean); the Nile Delta reaches the Mediterranean Sea.</a:t>
+              <a:t>The floodplain and the delta (also levees and ox-bow lakes).</a:t>
             </a:r>
             <a:endParaRPr lang="en-US" sz="4000" dirty="0"/>
           </a:p>
